--- a/report/M4/BIN381_M4_PersonA_Slides_1_4.pptx
+++ b/report/M4/BIN381_M4_PersonA_Slides_1_4.pptx
@@ -9,6 +9,9 @@
     <p:sldId id="257" r:id="rId3"/>
     <p:sldId id="258" r:id="rId4"/>
     <p:sldId id="259" r:id="rId5"/>
+    <p:sldId id="260" r:id="rId12"/>
+    <p:sldId id="261" r:id="rId13"/>
+    <p:sldId id="262" r:id="rId14"/>
   </p:sldIdLst>
   <p:sldSz cx="12192000" cy="6858000"/>
   <p:notesSz cx="6858000" cy="9144000"/>
@@ -184,6 +187,625 @@
     </pc:docChg>
   </pc:docChgLst>
 </pc:chgInfo>
+</file>
+
+<file path=ppt/notesMasters/notesMaster1.xml><?xml version="1.0" encoding="utf-8"?>
+<p:notesMaster xmlns:a="http://schemas.openxmlformats.org/drawingml/2006/main" xmlns:p="http://schemas.openxmlformats.org/presentationml/2006/main" xmlns:r="http://schemas.openxmlformats.org/officeDocument/2006/relationships">
+  <p:cSld>
+    <p:bg>
+      <p:bgRef idx="1001">
+        <a:schemeClr val="bg1"/>
+      </p:bgRef>
+    </p:bg>
+    <p:spTree>
+      <p:nvGrpSpPr>
+        <p:cNvPr id="1" name=""/>
+        <p:cNvGrpSpPr/>
+        <p:nvPr/>
+      </p:nvGrpSpPr>
+      <p:grpSpPr>
+        <a:xfrm>
+          <a:off x="0" y="0"/>
+          <a:ext cx="0" cy="0"/>
+          <a:chOff x="0" y="0"/>
+          <a:chExt cx="0" cy="0"/>
+        </a:xfrm>
+      </p:grpSpPr>
+      <p:sp>
+        <p:nvSpPr>
+          <p:cNvPr id="2" name="Header Placeholder 1"/>
+          <p:cNvSpPr>
+            <a:spLocks noGrp="1"/>
+          </p:cNvSpPr>
+          <p:nvPr>
+            <p:ph type="hdr" sz="quarter"/>
+          </p:nvPr>
+        </p:nvSpPr>
+        <p:spPr>
+          <a:xfrm>
+            <a:off x="0" y="0"/>
+            <a:ext cx="2971800" cy="457200"/>
+          </a:xfrm>
+          <a:prstGeom prst="rect">
+            <a:avLst/>
+          </a:prstGeom>
+        </p:spPr>
+        <p:txBody>
+          <a:bodyPr vert="horz" lIns="91440" tIns="45720" rIns="91440" bIns="45720" rtlCol="0"/>
+          <a:lstStyle>
+            <a:lvl1pPr algn="l">
+              <a:defRPr sz="1200"/>
+            </a:lvl1pPr>
+          </a:lstStyle>
+          <a:p>
+            <a:endParaRPr lang="en-US"/>
+          </a:p>
+        </p:txBody>
+      </p:sp>
+      <p:sp>
+        <p:nvSpPr>
+          <p:cNvPr id="3" name="Date Placeholder 2"/>
+          <p:cNvSpPr>
+            <a:spLocks noGrp="1"/>
+          </p:cNvSpPr>
+          <p:nvPr>
+            <p:ph type="dt" idx="1"/>
+          </p:nvPr>
+        </p:nvSpPr>
+        <p:spPr>
+          <a:xfrm>
+            <a:off x="3884613" y="0"/>
+            <a:ext cx="2971800" cy="457200"/>
+          </a:xfrm>
+          <a:prstGeom prst="rect">
+            <a:avLst/>
+          </a:prstGeom>
+        </p:spPr>
+        <p:txBody>
+          <a:bodyPr vert="horz" lIns="91440" tIns="45720" rIns="91440" bIns="45720" rtlCol="0"/>
+          <a:lstStyle>
+            <a:lvl1pPr algn="r">
+              <a:defRPr sz="1200"/>
+            </a:lvl1pPr>
+          </a:lstStyle>
+          <a:p>
+            <a:fld id="{0F89C1C7-3DCD-1040-A9CF-14679D8B5DDD}" type="datetimeFigureOut">
+              <a:rPr lang="en-US" smtClean="0"/>
+              <a:t>10/17/16</a:t>
+            </a:fld>
+            <a:endParaRPr lang="en-US"/>
+          </a:p>
+        </p:txBody>
+      </p:sp>
+      <p:sp>
+        <p:nvSpPr>
+          <p:cNvPr id="4" name="Slide Image Placeholder 3"/>
+          <p:cNvSpPr>
+            <a:spLocks noGrp="1" noRot="1" noChangeAspect="1"/>
+          </p:cNvSpPr>
+          <p:nvPr>
+            <p:ph type="sldImg" idx="2"/>
+          </p:nvPr>
+        </p:nvSpPr>
+        <p:spPr>
+          <a:xfrm>
+            <a:off x="1143000" y="685800"/>
+            <a:ext cx="4572000" cy="3429000"/>
+          </a:xfrm>
+          <a:prstGeom prst="rect">
+            <a:avLst/>
+          </a:prstGeom>
+          <a:noFill/>
+          <a:ln w="12700">
+            <a:solidFill>
+              <a:prstClr val="black"/>
+            </a:solidFill>
+          </a:ln>
+        </p:spPr>
+        <p:txBody>
+          <a:bodyPr vert="horz" lIns="91440" tIns="45720" rIns="91440" bIns="45720" rtlCol="0" anchor="ctr"/>
+          <a:lstStyle/>
+          <a:p>
+            <a:endParaRPr lang="en-US"/>
+          </a:p>
+        </p:txBody>
+      </p:sp>
+      <p:sp>
+        <p:nvSpPr>
+          <p:cNvPr id="5" name="Notes Placeholder 4"/>
+          <p:cNvSpPr>
+            <a:spLocks noGrp="1"/>
+          </p:cNvSpPr>
+          <p:nvPr>
+            <p:ph type="body" sz="quarter" idx="3"/>
+          </p:nvPr>
+        </p:nvSpPr>
+        <p:spPr>
+          <a:xfrm>
+            <a:off x="685800" y="4343400"/>
+            <a:ext cx="5486400" cy="4114800"/>
+          </a:xfrm>
+          <a:prstGeom prst="rect">
+            <a:avLst/>
+          </a:prstGeom>
+        </p:spPr>
+        <p:txBody>
+          <a:bodyPr vert="horz" lIns="91440" tIns="45720" rIns="91440" bIns="45720" rtlCol="0"/>
+          <a:lstStyle/>
+          <a:p>
+            <a:pPr lvl="0"/>
+            <a:r>
+              <a:rPr lang="en-US" smtClean="0"/>
+              <a:t>Click to edit Master text styles</a:t>
+            </a:r>
+          </a:p>
+          <a:p>
+            <a:pPr lvl="1"/>
+            <a:r>
+              <a:rPr lang="en-US" smtClean="0"/>
+              <a:t>Second level</a:t>
+            </a:r>
+          </a:p>
+          <a:p>
+            <a:pPr lvl="2"/>
+            <a:r>
+              <a:rPr lang="en-US" smtClean="0"/>
+              <a:t>Third level</a:t>
+            </a:r>
+          </a:p>
+          <a:p>
+            <a:pPr lvl="3"/>
+            <a:r>
+              <a:rPr lang="en-US" smtClean="0"/>
+              <a:t>Fourth level</a:t>
+            </a:r>
+          </a:p>
+          <a:p>
+            <a:pPr lvl="4"/>
+            <a:r>
+              <a:rPr lang="en-US" smtClean="0"/>
+              <a:t>Fifth level</a:t>
+            </a:r>
+            <a:endParaRPr lang="en-US"/>
+          </a:p>
+        </p:txBody>
+      </p:sp>
+      <p:sp>
+        <p:nvSpPr>
+          <p:cNvPr id="6" name="Footer Placeholder 5"/>
+          <p:cNvSpPr>
+            <a:spLocks noGrp="1"/>
+          </p:cNvSpPr>
+          <p:nvPr>
+            <p:ph type="ftr" sz="quarter" idx="4"/>
+          </p:nvPr>
+        </p:nvSpPr>
+        <p:spPr>
+          <a:xfrm>
+            <a:off x="0" y="8685213"/>
+            <a:ext cx="2971800" cy="457200"/>
+          </a:xfrm>
+          <a:prstGeom prst="rect">
+            <a:avLst/>
+          </a:prstGeom>
+        </p:spPr>
+        <p:txBody>
+          <a:bodyPr vert="horz" lIns="91440" tIns="45720" rIns="91440" bIns="45720" rtlCol="0" anchor="b"/>
+          <a:lstStyle>
+            <a:lvl1pPr algn="l">
+              <a:defRPr sz="1200"/>
+            </a:lvl1pPr>
+          </a:lstStyle>
+          <a:p>
+            <a:endParaRPr lang="en-US"/>
+          </a:p>
+        </p:txBody>
+      </p:sp>
+      <p:sp>
+        <p:nvSpPr>
+          <p:cNvPr id="7" name="Slide Number Placeholder 6"/>
+          <p:cNvSpPr>
+            <a:spLocks noGrp="1"/>
+          </p:cNvSpPr>
+          <p:nvPr>
+            <p:ph type="sldNum" sz="quarter" idx="5"/>
+          </p:nvPr>
+        </p:nvSpPr>
+        <p:spPr>
+          <a:xfrm>
+            <a:off x="3884613" y="8685213"/>
+            <a:ext cx="2971800" cy="457200"/>
+          </a:xfrm>
+          <a:prstGeom prst="rect">
+            <a:avLst/>
+          </a:prstGeom>
+        </p:spPr>
+        <p:txBody>
+          <a:bodyPr vert="horz" lIns="91440" tIns="45720" rIns="91440" bIns="45720" rtlCol="0" anchor="b"/>
+          <a:lstStyle>
+            <a:lvl1pPr algn="r">
+              <a:defRPr sz="1200"/>
+            </a:lvl1pPr>
+          </a:lstStyle>
+          <a:p>
+            <a:fld id="{BB5E49A5-4136-284D-997B-48E1D791AD67}" type="slidenum">
+              <a:rPr lang="en-US" smtClean="0"/>
+              <a:t>‹#›</a:t>
+            </a:fld>
+            <a:endParaRPr lang="en-US"/>
+          </a:p>
+        </p:txBody>
+      </p:sp>
+    </p:spTree>
+    <p:extLst>
+      <p:ext uri="{BB962C8B-B14F-4D97-AF65-F5344CB8AC3E}">
+        <p14:creationId xmlns:p14="http://schemas.microsoft.com/office/powerpoint/2010/main" val="2623252185"/>
+      </p:ext>
+    </p:extLst>
+  </p:cSld>
+  <p:clrMap bg1="lt1" tx1="dk1" bg2="lt2" tx2="dk2" accent1="accent1" accent2="accent2" accent3="accent3" accent4="accent4" accent5="accent5" accent6="accent6" hlink="hlink" folHlink="folHlink"/>
+  <p:notesStyle>
+    <a:lvl1pPr marL="0" algn="l" defTabSz="457200" rtl="0" eaLnBrk="1" latinLnBrk="0" hangingPunct="1">
+      <a:defRPr sz="1200" kern="1200">
+        <a:solidFill>
+          <a:schemeClr val="tx1"/>
+        </a:solidFill>
+        <a:latin typeface="+mn-lt"/>
+        <a:ea typeface="+mn-ea"/>
+        <a:cs typeface="+mn-cs"/>
+      </a:defRPr>
+    </a:lvl1pPr>
+    <a:lvl2pPr marL="457200" algn="l" defTabSz="457200" rtl="0" eaLnBrk="1" latinLnBrk="0" hangingPunct="1">
+      <a:defRPr sz="1200" kern="1200">
+        <a:solidFill>
+          <a:schemeClr val="tx1"/>
+        </a:solidFill>
+        <a:latin typeface="+mn-lt"/>
+        <a:ea typeface="+mn-ea"/>
+        <a:cs typeface="+mn-cs"/>
+      </a:defRPr>
+    </a:lvl2pPr>
+    <a:lvl3pPr marL="914400" algn="l" defTabSz="457200" rtl="0" eaLnBrk="1" latinLnBrk="0" hangingPunct="1">
+      <a:defRPr sz="1200" kern="1200">
+        <a:solidFill>
+          <a:schemeClr val="tx1"/>
+        </a:solidFill>
+        <a:latin typeface="+mn-lt"/>
+        <a:ea typeface="+mn-ea"/>
+        <a:cs typeface="+mn-cs"/>
+      </a:defRPr>
+    </a:lvl3pPr>
+    <a:lvl4pPr marL="1371600" algn="l" defTabSz="457200" rtl="0" eaLnBrk="1" latinLnBrk="0" hangingPunct="1">
+      <a:defRPr sz="1200" kern="1200">
+        <a:solidFill>
+          <a:schemeClr val="tx1"/>
+        </a:solidFill>
+        <a:latin typeface="+mn-lt"/>
+        <a:ea typeface="+mn-ea"/>
+        <a:cs typeface="+mn-cs"/>
+      </a:defRPr>
+    </a:lvl4pPr>
+    <a:lvl5pPr marL="1828800" algn="l" defTabSz="457200" rtl="0" eaLnBrk="1" latinLnBrk="0" hangingPunct="1">
+      <a:defRPr sz="1200" kern="1200">
+        <a:solidFill>
+          <a:schemeClr val="tx1"/>
+        </a:solidFill>
+        <a:latin typeface="+mn-lt"/>
+        <a:ea typeface="+mn-ea"/>
+        <a:cs typeface="+mn-cs"/>
+      </a:defRPr>
+    </a:lvl5pPr>
+    <a:lvl6pPr marL="2286000" algn="l" defTabSz="457200" rtl="0" eaLnBrk="1" latinLnBrk="0" hangingPunct="1">
+      <a:defRPr sz="1200" kern="1200">
+        <a:solidFill>
+          <a:schemeClr val="tx1"/>
+        </a:solidFill>
+        <a:latin typeface="+mn-lt"/>
+        <a:ea typeface="+mn-ea"/>
+        <a:cs typeface="+mn-cs"/>
+      </a:defRPr>
+    </a:lvl6pPr>
+    <a:lvl7pPr marL="2743200" algn="l" defTabSz="457200" rtl="0" eaLnBrk="1" latinLnBrk="0" hangingPunct="1">
+      <a:defRPr sz="1200" kern="1200">
+        <a:solidFill>
+          <a:schemeClr val="tx1"/>
+        </a:solidFill>
+        <a:latin typeface="+mn-lt"/>
+        <a:ea typeface="+mn-ea"/>
+        <a:cs typeface="+mn-cs"/>
+      </a:defRPr>
+    </a:lvl7pPr>
+    <a:lvl8pPr marL="3200400" algn="l" defTabSz="457200" rtl="0" eaLnBrk="1" latinLnBrk="0" hangingPunct="1">
+      <a:defRPr sz="1200" kern="1200">
+        <a:solidFill>
+          <a:schemeClr val="tx1"/>
+        </a:solidFill>
+        <a:latin typeface="+mn-lt"/>
+        <a:ea typeface="+mn-ea"/>
+        <a:cs typeface="+mn-cs"/>
+      </a:defRPr>
+    </a:lvl8pPr>
+    <a:lvl9pPr marL="3657600" algn="l" defTabSz="457200" rtl="0" eaLnBrk="1" latinLnBrk="0" hangingPunct="1">
+      <a:defRPr sz="1200" kern="1200">
+        <a:solidFill>
+          <a:schemeClr val="tx1"/>
+        </a:solidFill>
+        <a:latin typeface="+mn-lt"/>
+        <a:ea typeface="+mn-ea"/>
+        <a:cs typeface="+mn-cs"/>
+      </a:defRPr>
+    </a:lvl9pPr>
+  </p:notesStyle>
+</p:notesMaster>
+</file>
+
+<file path=ppt/notesSlides/notesSlide1.xml><?xml version="1.0" encoding="utf-8"?>
+<p:notes xmlns:a="http://schemas.openxmlformats.org/drawingml/2006/main" xmlns:p="http://schemas.openxmlformats.org/presentationml/2006/main" xmlns:r="http://schemas.openxmlformats.org/officeDocument/2006/relationships">
+  <p:cSld>
+    <p:spTree>
+      <p:nvGrpSpPr>
+        <p:cNvPr id="1" name=""/>
+        <p:cNvGrpSpPr/>
+        <p:nvPr/>
+      </p:nvGrpSpPr>
+      <p:grpSpPr>
+        <a:xfrm>
+          <a:off x="0" y="0"/>
+          <a:ext cx="0" cy="0"/>
+          <a:chOff x="0" y="0"/>
+          <a:chExt cx="0" cy="0"/>
+        </a:xfrm>
+      </p:grpSpPr>
+      <p:sp>
+        <p:nvSpPr>
+          <p:cNvPr id="2" name="Slide Image Placeholder 1"/>
+          <p:cNvSpPr>
+            <a:spLocks noGrp="1"/>
+          </p:cNvSpPr>
+          <p:nvPr>
+            <p:ph type="sldImg" idx="2"/>
+          </p:nvPr>
+        </p:nvSpPr>
+        <p:spPr/>
+      </p:sp>
+      <p:sp>
+        <p:nvSpPr>
+          <p:cNvPr id="3" name="Notes Placeholder 2"/>
+          <p:cNvSpPr>
+            <a:spLocks noGrp="1"/>
+          </p:cNvSpPr>
+          <p:nvPr>
+            <p:ph type="body" idx="3" sz="quarter"/>
+          </p:nvPr>
+        </p:nvSpPr>
+        <p:spPr/>
+        <p:txBody>
+          <a:bodyPr/>
+          <a:lstStyle/>
+          <a:p>
+            <a:r>
+              <a:t>We chose the threshold before we looked at the test data, with a rule agreed up front: find at least 80% of at-risk households at the fewest referrals. That lands on 0.24. On data the model had never seen it finds 80.7% of at-risk households, and 85.7% of the severely food insecure.</a:t>
+            </a:r>
+          </a:p>
+          <a:p/>
+          <a:p>
+            <a:r>
+              <a:t>The cost is the orange line. Four in ten referrals turn out to be food secure, and we send three in five households for follow-up. That is a dial, not a fact: raise the threshold and you visit fewer households but miss more. The dashboard lets programme managers set it against the capacity they actually have.</a:t>
+            </a:r>
+          </a:p>
+          <a:p/>
+          <a:p>
+            <a:r>
+              <a:t>A random forest scored slightly better (about 0.009 AUC). We kept the logistic model because every referral has to be explained to an official, and it gives one interpretable odds ratio per factor.</a:t>
+            </a:r>
+          </a:p>
+        </p:txBody>
+      </p:sp>
+      <p:sp>
+        <p:nvSpPr>
+          <p:cNvPr id="4" name="Slide Number Placeholder 3"/>
+          <p:cNvSpPr>
+            <a:spLocks noGrp="1"/>
+          </p:cNvSpPr>
+          <p:nvPr>
+            <p:ph type="sldNum" idx="5" sz="quarter"/>
+          </p:nvPr>
+        </p:nvSpPr>
+        <p:spPr/>
+      </p:sp>
+    </p:spTree>
+  </p:cSld>
+  <p:clrMapOvr>
+    <a:masterClrMapping/>
+  </p:clrMapOvr>
+</p:notes>
+</file>
+
+<file path=ppt/notesSlides/notesSlide2.xml><?xml version="1.0" encoding="utf-8"?>
+<p:notes xmlns:a="http://schemas.openxmlformats.org/drawingml/2006/main" xmlns:p="http://schemas.openxmlformats.org/presentationml/2006/main" xmlns:r="http://schemas.openxmlformats.org/officeDocument/2006/relationships">
+  <p:cSld>
+    <p:spTree>
+      <p:nvGrpSpPr>
+        <p:cNvPr id="1" name=""/>
+        <p:cNvGrpSpPr/>
+        <p:nvPr/>
+      </p:nvGrpSpPr>
+      <p:grpSpPr>
+        <a:xfrm>
+          <a:off x="0" y="0"/>
+          <a:ext cx="0" cy="0"/>
+          <a:chOff x="0" y="0"/>
+          <a:chExt cx="0" cy="0"/>
+        </a:xfrm>
+      </p:grpSpPr>
+      <p:sp>
+        <p:nvSpPr>
+          <p:cNvPr id="2" name="Slide Image Placeholder 1"/>
+          <p:cNvSpPr>
+            <a:spLocks noGrp="1"/>
+          </p:cNvSpPr>
+          <p:nvPr>
+            <p:ph type="sldImg" idx="2"/>
+          </p:nvPr>
+        </p:nvSpPr>
+        <p:spPr/>
+      </p:sp>
+      <p:sp>
+        <p:nvSpPr>
+          <p:cNvPr id="3" name="Notes Placeholder 2"/>
+          <p:cNvSpPr>
+            <a:spLocks noGrp="1"/>
+          </p:cNvSpPr>
+          <p:nvPr>
+            <p:ph type="body" idx="3" sz="quarter"/>
+          </p:nvPr>
+        </p:nvSpPr>
+        <p:spPr/>
+        <p:txBody>
+          <a:bodyPr/>
+          <a:lstStyle/>
+          <a:p>
+            <a:r>
+              <a:t>The strongest single signal is not income level, it is income change. Whether a household is worse off than a year ago matters about two and a half times more than any other answer, and it can be asked at intake in one sentence.</a:t>
+            </a:r>
+          </a:p>
+          <a:p/>
+          <a:p>
+            <a:r>
+              <a:t>Grant households are more food insecure, not less: 37.6% against 20.6%. That is not evidence that grants cause harm. Grants are means-tested, so they mark households that were already poor, and one survey wave cannot separate targeting from effect.</a:t>
+            </a:r>
+          </a:p>
+          <a:p/>
+          <a:p>
+            <a:r>
+              <a:t>The right-hand chart is the honest limitation. The screen finds 94% of at-risk households earning under R2,500 and only 39% above R11,500. It is weakest exactly where food insecurity is least expected, so a lower-risk result is not clearance, and self-referral stays open.</a:t>
+            </a:r>
+          </a:p>
+        </p:txBody>
+      </p:sp>
+      <p:sp>
+        <p:nvSpPr>
+          <p:cNvPr id="4" name="Slide Number Placeholder 3"/>
+          <p:cNvSpPr>
+            <a:spLocks noGrp="1"/>
+          </p:cNvSpPr>
+          <p:nvPr>
+            <p:ph type="sldNum" idx="5" sz="quarter"/>
+          </p:nvPr>
+        </p:nvSpPr>
+        <p:spPr/>
+      </p:sp>
+    </p:spTree>
+  </p:cSld>
+  <p:clrMapOvr>
+    <a:masterClrMapping/>
+  </p:clrMapOvr>
+</p:notes>
+</file>
+
+<file path=ppt/notesSlides/notesSlide3.xml><?xml version="1.0" encoding="utf-8"?>
+<p:notes xmlns:a="http://schemas.openxmlformats.org/drawingml/2006/main" xmlns:p="http://schemas.openxmlformats.org/presentationml/2006/main" xmlns:r="http://schemas.openxmlformats.org/officeDocument/2006/relationships">
+  <p:cSld>
+    <p:spTree>
+      <p:nvGrpSpPr>
+        <p:cNvPr id="1" name=""/>
+        <p:cNvGrpSpPr/>
+        <p:nvPr/>
+      </p:nvGrpSpPr>
+      <p:grpSpPr>
+        <a:xfrm>
+          <a:off x="0" y="0"/>
+          <a:ext cx="0" cy="0"/>
+          <a:chOff x="0" y="0"/>
+          <a:chExt cx="0" cy="0"/>
+        </a:xfrm>
+      </p:grpSpPr>
+      <p:sp>
+        <p:nvSpPr>
+          <p:cNvPr id="2" name="Slide Image Placeholder 1"/>
+          <p:cNvSpPr>
+            <a:spLocks noGrp="1"/>
+          </p:cNvSpPr>
+          <p:nvPr>
+            <p:ph type="sldImg" idx="2"/>
+          </p:nvPr>
+        </p:nvSpPr>
+        <p:spPr/>
+      </p:sp>
+      <p:sp>
+        <p:nvSpPr>
+          <p:cNvPr id="3" name="Notes Placeholder 2"/>
+          <p:cNvSpPr>
+            <a:spLocks noGrp="1"/>
+          </p:cNvSpPr>
+          <p:nvPr>
+            <p:ph type="body" idx="3" sz="quarter"/>
+          </p:nvPr>
+        </p:nvSpPr>
+        <p:spPr/>
+        <p:txBody>
+          <a:bodyPr/>
+          <a:lstStyle/>
+          <a:p>
+            <a:r>
+              <a:t>Have the dashboard open before the talk starts.</a:t>
+            </a:r>
+          </a:p>
+          <a:p>
+            <a:r>
+              <a:t>1. Overview page: six decision questions, every page answers one of them.</a:t>
+            </a:r>
+          </a:p>
+          <a:p>
+            <a:r>
+              <a:t>2. 'How well the screen works': the four cards are the slide 5 numbers, live from the final dataset.</a:t>
+            </a:r>
+          </a:p>
+          <a:p>
+            <a:r>
+              <a:t>3. Set the threshold to 0.30: recall drops from 80.7% to 67.8% and referrals from 59% to 44%, about 150 fewer households per thousand to visit and roughly one in eight at-risk households newly missed. Put it back to 0.24.</a:t>
+            </a:r>
+          </a:p>
+          <a:p>
+            <a:r>
+              <a:t>4. 'Who the screen misses': click through income, grants and province. Income above R11,500 sits far outside the tolerance band, a documented limitation.</a:t>
+            </a:r>
+          </a:p>
+          <a:p>
+            <a:r>
+              <a:t>5. 'What drives risk': income change at the top, odds ratios with confidence intervals.</a:t>
+            </a:r>
+          </a:p>
+          <a:p>
+            <a:r>
+              <a:t>6. Hand over to Timothy for the Shiny app.</a:t>
+            </a:r>
+          </a:p>
+          <a:p>
+            <a:r>
+              <a:t>If the live demo fails, use this screenshot and slides 5 and 6, and keep going.</a:t>
+            </a:r>
+          </a:p>
+        </p:txBody>
+      </p:sp>
+      <p:sp>
+        <p:nvSpPr>
+          <p:cNvPr id="4" name="Slide Number Placeholder 3"/>
+          <p:cNvSpPr>
+            <a:spLocks noGrp="1"/>
+          </p:cNvSpPr>
+          <p:nvPr>
+            <p:ph type="sldNum" idx="5" sz="quarter"/>
+          </p:nvPr>
+        </p:nvSpPr>
+        <p:spPr/>
+      </p:sp>
+    </p:spTree>
+  </p:cSld>
+  <p:clrMapOvr>
+    <a:masterClrMapping/>
+  </p:clrMapOvr>
+</p:notes>
 </file>
 
 <file path=ppt/slideLayouts/slideLayout1.xml><?xml version="1.0" encoding="utf-8"?>
@@ -7078,6 +7700,947 @@
 </p:sld>
 </file>
 
+<file path=ppt/slides/slide5.xml><?xml version="1.0" encoding="utf-8"?>
+<p:sld xmlns:a="http://schemas.openxmlformats.org/drawingml/2006/main" xmlns:r="http://schemas.openxmlformats.org/officeDocument/2006/relationships" xmlns:p="http://schemas.openxmlformats.org/presentationml/2006/main">
+  <p:cSld>
+    <p:spTree>
+      <p:nvGrpSpPr>
+        <p:cNvPr id="1" name=""/>
+        <p:cNvGrpSpPr/>
+        <p:nvPr/>
+      </p:nvGrpSpPr>
+      <p:grpSpPr>
+        <a:xfrm>
+          <a:off x="0" y="0"/>
+          <a:ext cx="0" cy="0"/>
+          <a:chOff x="0" y="0"/>
+          <a:chExt cx="0" cy="0"/>
+        </a:xfrm>
+      </p:grpSpPr>
+      <p:sp>
+        <p:nvSpPr>
+          <p:cNvPr id="2" name="Title 1">
+            <a:extLst>
+              <a:ext uri="{FF2B5EF4-FFF2-40B4-BE49-F238E27FC236}">
+                <a16:creationId xmlns:a16="http://schemas.microsoft.com/office/drawing/2014/main" id="{4D4CE32E-349F-204C-A27D-356C6EDF91DA}"/>
+              </a:ext>
+            </a:extLst>
+          </p:cNvPr>
+          <p:cNvSpPr>
+            <a:spLocks noGrp="1"/>
+          </p:cNvSpPr>
+          <p:nvPr>
+            <p:ph type="title"/>
+          </p:nvPr>
+        </p:nvSpPr>
+        <p:spPr>
+          <a:xfrm>
+            <a:off x="1141413" y="609600"/>
+            <a:ext cx="9905998" cy="653308"/>
+          </a:xfrm>
+        </p:spPr>
+        <p:txBody>
+          <a:bodyPr/>
+          <a:lstStyle/>
+          <a:p>
+            <a:r>
+              <a:rPr lang="en-ZA" dirty="0"/>
+              <a:t>Model performance</a:t>
+            </a:r>
+          </a:p>
+        </p:txBody>
+      </p:sp>
+      <p:sp>
+        <p:nvSpPr>
+          <p:cNvPr id="3" name="TextBox 2">
+            <a:extLst>
+              <a:ext uri="{FF2B5EF4-FFF2-40B4-BE49-F238E27FC236}">
+                <a16:creationId xmlns:a16="http://schemas.microsoft.com/office/drawing/2014/main" id="{92BCFF48-3F33-E6B7-6337-4337D115CD31}"/>
+              </a:ext>
+            </a:extLst>
+          </p:cNvPr>
+          <p:cNvSpPr txBox="1"/>
+          <p:nvPr/>
+        </p:nvSpPr>
+        <p:spPr>
+          <a:xfrm>
+            <a:off x="1141413" y="1562100"/>
+            <a:ext cx="9906000" cy="461665"/>
+          </a:xfrm>
+          <a:prstGeom prst="rect">
+            <a:avLst/>
+          </a:prstGeom>
+          <a:noFill/>
+        </p:spPr>
+        <p:txBody>
+          <a:bodyPr wrap="square" rtlCol="0">
+            <a:spAutoFit/>
+          </a:bodyPr>
+          <a:lstStyle/>
+          <a:p>
+            <a:r>
+              <a:rPr lang="en-ZA" sz="2400" dirty="0">
+                <a:latin typeface="Aptos" panose="020B0004020202020204" pitchFamily="34" charset="0"/>
+              </a:rPr>
+              <a:t>The screen finds 4 in 5 at-risk households, and refers 3 in 5</a:t>
+            </a:r>
+          </a:p>
+        </p:txBody>
+      </p:sp>
+      <p:sp>
+        <p:nvSpPr>
+          <p:cNvPr id="6" name="TextBox 5">
+            <a:extLst>
+              <a:ext uri="{FF2B5EF4-FFF2-40B4-BE49-F238E27FC236}">
+                <a16:creationId xmlns:a16="http://schemas.microsoft.com/office/drawing/2014/main" id="{5C2C44F7-D166-FB5F-7D0B-3458C77DA94B}"/>
+              </a:ext>
+            </a:extLst>
+          </p:cNvPr>
+          <p:cNvSpPr txBox="1"/>
+          <p:nvPr/>
+        </p:nvSpPr>
+        <p:spPr>
+          <a:xfrm>
+            <a:off x="1143000" y="4927600"/>
+            <a:ext cx="2349500" cy="800100"/>
+          </a:xfrm>
+          <a:prstGeom prst="rect">
+            <a:avLst/>
+          </a:prstGeom>
+          <a:noFill/>
+        </p:spPr>
+        <p:txBody>
+          <a:bodyPr wrap="square" rtlCol="0">
+            <a:spAutoFit/>
+          </a:bodyPr>
+          <a:lstStyle/>
+          <a:p>
+            <a:r>
+              <a:rPr lang="en-ZA" sz="3600" dirty="0">
+                <a:latin typeface="Aptos" panose="020B0004020202020204" pitchFamily="34" charset="0"/>
+              </a:rPr>
+              <a:t>80.7%</a:t>
+            </a:r>
+          </a:p>
+          <a:p>
+            <a:r>
+              <a:rPr lang="en-ZA" sz="1000" dirty="0">
+                <a:latin typeface="Aptos" panose="020B0004020202020204" pitchFamily="34" charset="0"/>
+              </a:rPr>
+              <a:t>of at-risk households found</a:t>
+            </a:r>
+          </a:p>
+        </p:txBody>
+      </p:sp>
+      <p:sp>
+        <p:nvSpPr>
+          <p:cNvPr id="8" name="TextBox 7">
+            <a:extLst>
+              <a:ext uri="{FF2B5EF4-FFF2-40B4-BE49-F238E27FC236}">
+                <a16:creationId xmlns:a16="http://schemas.microsoft.com/office/drawing/2014/main" id="{B9A568E5-722C-74CF-AC98-859FEBDA85B7}"/>
+              </a:ext>
+            </a:extLst>
+          </p:cNvPr>
+          <p:cNvSpPr txBox="1"/>
+          <p:nvPr/>
+        </p:nvSpPr>
+        <p:spPr>
+          <a:xfrm>
+            <a:off x="3619500" y="4927600"/>
+            <a:ext cx="2349500" cy="800100"/>
+          </a:xfrm>
+          <a:prstGeom prst="rect">
+            <a:avLst/>
+          </a:prstGeom>
+          <a:noFill/>
+        </p:spPr>
+        <p:txBody>
+          <a:bodyPr wrap="square" rtlCol="0">
+            <a:spAutoFit/>
+          </a:bodyPr>
+          <a:lstStyle/>
+          <a:p>
+            <a:r>
+              <a:rPr lang="en-ZA" sz="3600" dirty="0">
+                <a:latin typeface="Aptos" panose="020B0004020202020204" pitchFamily="34" charset="0"/>
+              </a:rPr>
+              <a:t>41.9%</a:t>
+            </a:r>
+          </a:p>
+          <a:p>
+            <a:r>
+              <a:rPr lang="en-ZA" sz="1000" dirty="0">
+                <a:latin typeface="Aptos" panose="020B0004020202020204" pitchFamily="34" charset="0"/>
+              </a:rPr>
+              <a:t>of referrals genuinely at risk</a:t>
+            </a:r>
+          </a:p>
+        </p:txBody>
+      </p:sp>
+      <p:sp>
+        <p:nvSpPr>
+          <p:cNvPr id="10" name="TextBox 9">
+            <a:extLst>
+              <a:ext uri="{FF2B5EF4-FFF2-40B4-BE49-F238E27FC236}">
+                <a16:creationId xmlns:a16="http://schemas.microsoft.com/office/drawing/2014/main" id="{2AF11DEB-8FB8-305B-DCBD-C845910BFE19}"/>
+              </a:ext>
+            </a:extLst>
+          </p:cNvPr>
+          <p:cNvSpPr txBox="1"/>
+          <p:nvPr/>
+        </p:nvSpPr>
+        <p:spPr>
+          <a:xfrm>
+            <a:off x="6096000" y="4927600"/>
+            <a:ext cx="2349500" cy="800100"/>
+          </a:xfrm>
+          <a:prstGeom prst="rect">
+            <a:avLst/>
+          </a:prstGeom>
+          <a:noFill/>
+        </p:spPr>
+        <p:txBody>
+          <a:bodyPr wrap="square" rtlCol="0">
+            <a:spAutoFit/>
+          </a:bodyPr>
+          <a:lstStyle/>
+          <a:p>
+            <a:r>
+              <a:rPr lang="en-ZA" sz="3600" dirty="0">
+                <a:latin typeface="Aptos" panose="020B0004020202020204" pitchFamily="34" charset="0"/>
+              </a:rPr>
+              <a:t>58.9%</a:t>
+            </a:r>
+          </a:p>
+          <a:p>
+            <a:r>
+              <a:rPr lang="en-ZA" sz="1000" dirty="0">
+                <a:latin typeface="Aptos" panose="020B0004020202020204" pitchFamily="34" charset="0"/>
+              </a:rPr>
+              <a:t>of households sent for follow-up</a:t>
+            </a:r>
+          </a:p>
+        </p:txBody>
+      </p:sp>
+      <p:sp>
+        <p:nvSpPr>
+          <p:cNvPr id="12" name="TextBox 11">
+            <a:extLst>
+              <a:ext uri="{FF2B5EF4-FFF2-40B4-BE49-F238E27FC236}">
+                <a16:creationId xmlns:a16="http://schemas.microsoft.com/office/drawing/2014/main" id="{1B1756CB-70A7-1D40-035E-C9204C6C5E1B}"/>
+              </a:ext>
+            </a:extLst>
+          </p:cNvPr>
+          <p:cNvSpPr txBox="1"/>
+          <p:nvPr/>
+        </p:nvSpPr>
+        <p:spPr>
+          <a:xfrm>
+            <a:off x="1141412" y="5848290"/>
+            <a:ext cx="9906000" cy="246221"/>
+          </a:xfrm>
+          <a:prstGeom prst="rect">
+            <a:avLst/>
+          </a:prstGeom>
+          <a:noFill/>
+        </p:spPr>
+        <p:txBody>
+          <a:bodyPr wrap="square">
+            <a:spAutoFit/>
+          </a:bodyPr>
+          <a:lstStyle/>
+          <a:p>
+            <a:r>
+              <a:rPr lang="en-ZA" sz="1000" dirty="0">
+                <a:latin typeface="Aptos" panose="020B0004020202020204" pitchFamily="34" charset="0"/>
+              </a:rPr>
+              <a:t>Measured once on 6,279 held-out test households. The threshold was fixed on cross-validation before testing.</a:t>
+            </a:r>
+          </a:p>
+        </p:txBody>
+      </p:sp>
+      <p:pic>
+        <p:nvPicPr>
+          <p:cNvPr id="13" name="Picture 12" descr="slide5_threshold.png"/>
+          <p:cNvPicPr>
+            <a:picLocks noChangeAspect="1"/>
+          </p:cNvPicPr>
+          <p:nvPr/>
+        </p:nvPicPr>
+        <p:blipFill>
+          <a:blip r:embed="rId3"/>
+          <a:stretch>
+            <a:fillRect/>
+          </a:stretch>
+        </p:blipFill>
+        <p:spPr>
+          <a:xfrm>
+            <a:off x="2857500" y="2095500"/>
+            <a:ext cx="6477000" cy="2797186"/>
+          </a:xfrm>
+          <a:prstGeom prst="rect">
+            <a:avLst/>
+          </a:prstGeom>
+        </p:spPr>
+      </p:pic>
+      <p:sp>
+        <p:nvSpPr>
+          <p:cNvPr id="14" name="TextBox 13">
+            <a:extLst>
+              <a:ext uri="{FF2B5EF4-FFF2-40B4-BE49-F238E27FC236}">
+                <a16:creationId xmlns:a16="http://schemas.microsoft.com/office/drawing/2014/main" id="{5C2C44F7-D166-FB5F-7D0B-3458C77DA94B}"/>
+              </a:ext>
+            </a:extLst>
+          </p:cNvPr>
+          <p:cNvSpPr txBox="1"/>
+          <p:nvPr/>
+        </p:nvSpPr>
+        <p:spPr>
+          <a:xfrm>
+            <a:off x="8572500" y="4927600"/>
+            <a:ext cx="2349500" cy="800100"/>
+          </a:xfrm>
+          <a:prstGeom prst="rect">
+            <a:avLst/>
+          </a:prstGeom>
+          <a:noFill/>
+        </p:spPr>
+        <p:txBody>
+          <a:bodyPr wrap="square" rtlCol="0">
+            <a:spAutoFit/>
+          </a:bodyPr>
+          <a:lstStyle/>
+          <a:p>
+            <a:r>
+              <a:rPr lang="en-ZA" sz="3600" dirty="0">
+                <a:latin typeface="Aptos" panose="020B0004020202020204" pitchFamily="34" charset="0"/>
+              </a:rPr>
+              <a:t>0.736</a:t>
+            </a:r>
+          </a:p>
+          <a:p>
+            <a:r>
+              <a:rPr lang="en-ZA" sz="1000" dirty="0">
+                <a:latin typeface="Aptos" panose="020B0004020202020204" pitchFamily="34" charset="0"/>
+              </a:rPr>
+              <a:t>ROC-AUC (0.5 = coin flip)</a:t>
+            </a:r>
+          </a:p>
+        </p:txBody>
+      </p:sp>
+    </p:spTree>
+    <p:extLst>
+      <p:ext uri="{BB962C8B-B14F-4D97-AF65-F5344CB8AC3E}">
+        <p14:creationId xmlns:p14="http://schemas.microsoft.com/office/powerpoint/2010/main" val="467632067"/>
+      </p:ext>
+    </p:extLst>
+  </p:cSld>
+  <p:clrMapOvr>
+    <a:masterClrMapping/>
+  </p:clrMapOvr>
+</p:sld>
+</file>
+
+<file path=ppt/slides/slide6.xml><?xml version="1.0" encoding="utf-8"?>
+<p:sld xmlns:a="http://schemas.openxmlformats.org/drawingml/2006/main" xmlns:r="http://schemas.openxmlformats.org/officeDocument/2006/relationships" xmlns:p="http://schemas.openxmlformats.org/presentationml/2006/main">
+  <p:cSld>
+    <p:spTree>
+      <p:nvGrpSpPr>
+        <p:cNvPr id="1" name=""/>
+        <p:cNvGrpSpPr/>
+        <p:nvPr/>
+      </p:nvGrpSpPr>
+      <p:grpSpPr>
+        <a:xfrm>
+          <a:off x="0" y="0"/>
+          <a:ext cx="0" cy="0"/>
+          <a:chOff x="0" y="0"/>
+          <a:chExt cx="0" cy="0"/>
+        </a:xfrm>
+      </p:grpSpPr>
+      <p:sp>
+        <p:nvSpPr>
+          <p:cNvPr id="2" name="Title 1">
+            <a:extLst>
+              <a:ext uri="{FF2B5EF4-FFF2-40B4-BE49-F238E27FC236}">
+                <a16:creationId xmlns:a16="http://schemas.microsoft.com/office/drawing/2014/main" id="{459F4360-6490-5821-C767-8B253775AAC8}"/>
+              </a:ext>
+            </a:extLst>
+          </p:cNvPr>
+          <p:cNvSpPr>
+            <a:spLocks noGrp="1"/>
+          </p:cNvSpPr>
+          <p:nvPr>
+            <p:ph type="title"/>
+          </p:nvPr>
+        </p:nvSpPr>
+        <p:spPr>
+          <a:xfrm>
+            <a:off x="1141413" y="609600"/>
+            <a:ext cx="9905998" cy="660400"/>
+          </a:xfrm>
+        </p:spPr>
+        <p:txBody>
+          <a:bodyPr/>
+          <a:lstStyle/>
+          <a:p>
+            <a:r>
+              <a:rPr lang="en-ZA" dirty="0"/>
+              <a:t>Key findings</a:t>
+            </a:r>
+          </a:p>
+        </p:txBody>
+      </p:sp>
+      <p:sp>
+        <p:nvSpPr>
+          <p:cNvPr id="3" name="TextBox 2">
+            <a:extLst>
+              <a:ext uri="{FF2B5EF4-FFF2-40B4-BE49-F238E27FC236}">
+                <a16:creationId xmlns:a16="http://schemas.microsoft.com/office/drawing/2014/main" id="{FE9297A4-1992-4484-5CC0-1890A6C615D8}"/>
+              </a:ext>
+            </a:extLst>
+          </p:cNvPr>
+          <p:cNvSpPr txBox="1"/>
+          <p:nvPr/>
+        </p:nvSpPr>
+        <p:spPr>
+          <a:xfrm>
+            <a:off x="1141413" y="1466849"/>
+            <a:ext cx="9828211" cy="461665"/>
+          </a:xfrm>
+          <a:prstGeom prst="rect">
+            <a:avLst/>
+          </a:prstGeom>
+          <a:noFill/>
+        </p:spPr>
+        <p:txBody>
+          <a:bodyPr wrap="square" rtlCol="0">
+            <a:spAutoFit/>
+          </a:bodyPr>
+          <a:lstStyle/>
+          <a:p>
+            <a:r>
+              <a:rPr lang="en-ZA" sz="2400" dirty="0">
+                <a:latin typeface="Aptos" panose="020B0004020202020204" pitchFamily="34" charset="0"/>
+              </a:rPr>
+              <a:t>Income change is the warning sign, but the better-off get missed</a:t>
+            </a:r>
+          </a:p>
+        </p:txBody>
+      </p:sp>
+      <p:sp>
+        <p:nvSpPr>
+          <p:cNvPr id="6" name="TextBox 5">
+            <a:extLst>
+              <a:ext uri="{FF2B5EF4-FFF2-40B4-BE49-F238E27FC236}">
+                <a16:creationId xmlns:a16="http://schemas.microsoft.com/office/drawing/2014/main" id="{0B20D662-6E1A-AFE4-9EDF-5CB8010C8DDE}"/>
+              </a:ext>
+            </a:extLst>
+          </p:cNvPr>
+          <p:cNvSpPr txBox="1"/>
+          <p:nvPr/>
+        </p:nvSpPr>
+        <p:spPr>
+          <a:xfrm>
+            <a:off x="7956550" y="2125363"/>
+            <a:ext cx="3575050" cy="3139321"/>
+          </a:xfrm>
+          <a:prstGeom prst="rect">
+            <a:avLst/>
+          </a:prstGeom>
+          <a:noFill/>
+        </p:spPr>
+        <p:txBody>
+          <a:bodyPr wrap="square" rtlCol="0">
+            <a:spAutoFit/>
+          </a:bodyPr>
+          <a:lstStyle/>
+          <a:p>
+            <a:r>
+              <a:rPr lang="en-ZA" sz="2400" b="1" u="sng" dirty="0">
+                <a:effectLst>
+                  <a:outerShdw blurRad="38100" dist="38100" dir="2700000" algn="tl">
+                    <a:srgbClr val="000000">
+                      <a:alpha val="43137"/>
+                    </a:srgbClr>
+                  </a:outerShdw>
+                </a:effectLst>
+                <a:latin typeface="Aptos" panose="020B0004020202020204" pitchFamily="34" charset="0"/>
+              </a:rPr>
+              <a:t>Income change leads</a:t>
+            </a:r>
+          </a:p>
+          <a:p>
+            <a:r>
+              <a:rPr lang="en-ZA" dirty="0">
+                <a:latin typeface="Aptos" panose="020B0004020202020204" pitchFamily="34" charset="0"/>
+              </a:rPr>
+              <a:t>AUC drop 0.082, about 2.5 times the next answer</a:t>
+            </a:r>
+          </a:p>
+          <a:p>
+            <a:r>
+              <a:rPr lang="en-ZA" sz="2400" b="1" u="sng" dirty="0">
+                <a:latin typeface="Aptos" panose="020B0004020202020204" pitchFamily="34" charset="0"/>
+              </a:rPr>
+              <a:t>Grants mark need</a:t>
+            </a:r>
+          </a:p>
+          <a:p>
+            <a:r>
+              <a:rPr lang="en-ZA" dirty="0">
+                <a:latin typeface="Aptos" panose="020B0004020202020204" pitchFamily="34" charset="0"/>
+              </a:rPr>
+              <a:t>37.6% of grant households are at risk vs 20.6% without: targeting, not harm</a:t>
+            </a:r>
+          </a:p>
+          <a:p>
+            <a:r>
+              <a:rPr lang="en-ZA" sz="2400" b="1" u="sng" dirty="0">
+                <a:effectLst>
+                  <a:outerShdw blurRad="38100" dist="38100" dir="2700000" algn="tl">
+                    <a:srgbClr val="000000">
+                      <a:alpha val="43137"/>
+                    </a:srgbClr>
+                  </a:outerShdw>
+                </a:effectLst>
+                <a:latin typeface="Aptos" panose="020B0004020202020204" pitchFamily="34" charset="0"/>
+              </a:rPr>
+              <a:t>Weakest above R11,500</a:t>
+            </a:r>
+          </a:p>
+          <a:p>
+            <a:r>
+              <a:rPr lang="en-ZA" dirty="0">
+                <a:effectLst>
+                  <a:outerShdw blurRad="38100" dist="38100" dir="2700000" algn="tl">
+                    <a:srgbClr val="000000">
+                      <a:alpha val="43137"/>
+                    </a:srgbClr>
+                  </a:outerShdw>
+                </a:effectLst>
+                <a:latin typeface="Aptos" panose="020B0004020202020204" pitchFamily="34" charset="0"/>
+              </a:rPr>
+              <a:t>Only 39.2% found there, so a low score is not clearance</a:t>
+            </a:r>
+            <a:endParaRPr lang="en-ZA" dirty="0">
+              <a:latin typeface="Aptos" panose="020B0004020202020204" pitchFamily="34" charset="0"/>
+            </a:endParaRPr>
+          </a:p>
+        </p:txBody>
+      </p:sp>
+      <p:sp>
+        <p:nvSpPr>
+          <p:cNvPr id="7" name="TextBox 6">
+            <a:extLst>
+              <a:ext uri="{FF2B5EF4-FFF2-40B4-BE49-F238E27FC236}">
+                <a16:creationId xmlns:a16="http://schemas.microsoft.com/office/drawing/2014/main" id="{0F3B1B2A-8E7E-D69D-CCB1-A24D0C4A1ECE}"/>
+              </a:ext>
+            </a:extLst>
+          </p:cNvPr>
+          <p:cNvSpPr txBox="1"/>
+          <p:nvPr/>
+        </p:nvSpPr>
+        <p:spPr>
+          <a:xfrm>
+            <a:off x="1141413" y="4914900"/>
+            <a:ext cx="6194624" cy="400110"/>
+          </a:xfrm>
+          <a:prstGeom prst="rect">
+            <a:avLst/>
+          </a:prstGeom>
+          <a:noFill/>
+        </p:spPr>
+        <p:txBody>
+          <a:bodyPr wrap="square" rtlCol="0">
+            <a:spAutoFit/>
+          </a:bodyPr>
+          <a:lstStyle/>
+          <a:p>
+            <a:r>
+              <a:rPr lang="en-ZA" sz="1000" dirty="0"/>
+              <a:t>Left: permutation importance on the test set. Right: recall by group; orange is outside the 10-point tolerance band.</a:t>
+            </a:r>
+          </a:p>
+        </p:txBody>
+      </p:sp>
+      <p:sp>
+        <p:nvSpPr>
+          <p:cNvPr id="9" name="TextBox 8">
+            <a:extLst>
+              <a:ext uri="{FF2B5EF4-FFF2-40B4-BE49-F238E27FC236}">
+                <a16:creationId xmlns:a16="http://schemas.microsoft.com/office/drawing/2014/main" id="{CACA6238-8B81-7B10-6122-1E33CB7F4BD8}"/>
+              </a:ext>
+            </a:extLst>
+          </p:cNvPr>
+          <p:cNvSpPr txBox="1"/>
+          <p:nvPr/>
+        </p:nvSpPr>
+        <p:spPr>
+          <a:xfrm>
+            <a:off x="1141412" y="5848290"/>
+            <a:ext cx="6815137" cy="246221"/>
+          </a:xfrm>
+          <a:prstGeom prst="rect">
+            <a:avLst/>
+          </a:prstGeom>
+          <a:noFill/>
+        </p:spPr>
+        <p:txBody>
+          <a:bodyPr wrap="square">
+            <a:spAutoFit/>
+          </a:bodyPr>
+          <a:lstStyle/>
+          <a:p>
+            <a:r>
+              <a:rPr lang="en-ZA" sz="1000" dirty="0">
+                <a:latin typeface="Aptos" panose="020B0004020202020204" pitchFamily="34" charset="0"/>
+              </a:rPr>
+              <a:t>58.3% of households whose income fell sharply are food insecure, against 18-21% mid-scale.</a:t>
+            </a:r>
+            <a:endParaRPr lang="en-ZA" sz="1000" dirty="0">
+              <a:latin typeface="Aptos" panose="020B0004020202020204" pitchFamily="34" charset="0"/>
+            </a:endParaRPr>
+          </a:p>
+        </p:txBody>
+      </p:sp>
+      <p:pic>
+        <p:nvPicPr>
+          <p:cNvPr id="10" name="Picture 9" descr="slide6_findings.png"/>
+          <p:cNvPicPr>
+            <a:picLocks noChangeAspect="1"/>
+          </p:cNvPicPr>
+          <p:nvPr/>
+        </p:nvPicPr>
+        <p:blipFill>
+          <a:blip r:embed="rId3"/>
+          <a:stretch>
+            <a:fillRect/>
+          </a:stretch>
+        </p:blipFill>
+        <p:spPr>
+          <a:xfrm>
+            <a:off x="1143000" y="2120900"/>
+            <a:ext cx="6197600" cy="2676523"/>
+          </a:xfrm>
+          <a:prstGeom prst="rect">
+            <a:avLst/>
+          </a:prstGeom>
+        </p:spPr>
+      </p:pic>
+    </p:spTree>
+    <p:extLst>
+      <p:ext uri="{BB962C8B-B14F-4D97-AF65-F5344CB8AC3E}">
+        <p14:creationId xmlns:p14="http://schemas.microsoft.com/office/powerpoint/2010/main" val="556620780"/>
+      </p:ext>
+    </p:extLst>
+  </p:cSld>
+  <p:clrMapOvr>
+    <a:masterClrMapping/>
+  </p:clrMapOvr>
+</p:sld>
+</file>
+
+<file path=ppt/slides/slide7.xml><?xml version="1.0" encoding="utf-8"?>
+<p:sld xmlns:a="http://schemas.openxmlformats.org/drawingml/2006/main" xmlns:r="http://schemas.openxmlformats.org/officeDocument/2006/relationships" xmlns:p="http://schemas.openxmlformats.org/presentationml/2006/main">
+  <p:cSld>
+    <p:spTree>
+      <p:nvGrpSpPr>
+        <p:cNvPr id="1" name=""/>
+        <p:cNvGrpSpPr/>
+        <p:nvPr/>
+      </p:nvGrpSpPr>
+      <p:grpSpPr>
+        <a:xfrm>
+          <a:off x="0" y="0"/>
+          <a:ext cx="0" cy="0"/>
+          <a:chOff x="0" y="0"/>
+          <a:chExt cx="0" cy="0"/>
+        </a:xfrm>
+      </p:grpSpPr>
+      <p:sp>
+        <p:nvSpPr>
+          <p:cNvPr id="2" name="Title 1">
+            <a:extLst>
+              <a:ext uri="{FF2B5EF4-FFF2-40B4-BE49-F238E27FC236}">
+                <a16:creationId xmlns:a16="http://schemas.microsoft.com/office/drawing/2014/main" id="{459F4360-6490-5821-C767-8B253775AAC8}"/>
+              </a:ext>
+            </a:extLst>
+          </p:cNvPr>
+          <p:cNvSpPr>
+            <a:spLocks noGrp="1"/>
+          </p:cNvSpPr>
+          <p:nvPr>
+            <p:ph type="title"/>
+          </p:nvPr>
+        </p:nvSpPr>
+        <p:spPr>
+          <a:xfrm>
+            <a:off x="1141413" y="609600"/>
+            <a:ext cx="9905998" cy="660400"/>
+          </a:xfrm>
+        </p:spPr>
+        <p:txBody>
+          <a:bodyPr/>
+          <a:lstStyle/>
+          <a:p>
+            <a:r>
+              <a:rPr lang="en-ZA" dirty="0"/>
+              <a:t>Dashboard demo</a:t>
+            </a:r>
+          </a:p>
+        </p:txBody>
+      </p:sp>
+      <p:sp>
+        <p:nvSpPr>
+          <p:cNvPr id="3" name="TextBox 2">
+            <a:extLst>
+              <a:ext uri="{FF2B5EF4-FFF2-40B4-BE49-F238E27FC236}">
+                <a16:creationId xmlns:a16="http://schemas.microsoft.com/office/drawing/2014/main" id="{FE9297A4-1992-4484-5CC0-1890A6C615D8}"/>
+              </a:ext>
+            </a:extLst>
+          </p:cNvPr>
+          <p:cNvSpPr txBox="1"/>
+          <p:nvPr/>
+        </p:nvSpPr>
+        <p:spPr>
+          <a:xfrm>
+            <a:off x="1141413" y="1466849"/>
+            <a:ext cx="9828211" cy="461665"/>
+          </a:xfrm>
+          <a:prstGeom prst="rect">
+            <a:avLst/>
+          </a:prstGeom>
+          <a:noFill/>
+        </p:spPr>
+        <p:txBody>
+          <a:bodyPr wrap="square" rtlCol="0">
+            <a:spAutoFit/>
+          </a:bodyPr>
+          <a:lstStyle/>
+          <a:p>
+            <a:r>
+              <a:rPr lang="en-ZA" sz="2400" dirty="0">
+                <a:latin typeface="Aptos" panose="020B0004020202020204" pitchFamily="34" charset="0"/>
+              </a:rPr>
+              <a:t>Setting the referral threshold against real capacity</a:t>
+            </a:r>
+          </a:p>
+        </p:txBody>
+      </p:sp>
+      <p:sp>
+        <p:nvSpPr>
+          <p:cNvPr id="6" name="TextBox 5">
+            <a:extLst>
+              <a:ext uri="{FF2B5EF4-FFF2-40B4-BE49-F238E27FC236}">
+                <a16:creationId xmlns:a16="http://schemas.microsoft.com/office/drawing/2014/main" id="{0B20D662-6E1A-AFE4-9EDF-5CB8010C8DDE}"/>
+              </a:ext>
+            </a:extLst>
+          </p:cNvPr>
+          <p:cNvSpPr txBox="1"/>
+          <p:nvPr/>
+        </p:nvSpPr>
+        <p:spPr>
+          <a:xfrm>
+            <a:off x="7620000" y="2125363"/>
+            <a:ext cx="4064000" cy="3139321"/>
+          </a:xfrm>
+          <a:prstGeom prst="rect">
+            <a:avLst/>
+          </a:prstGeom>
+          <a:noFill/>
+        </p:spPr>
+        <p:txBody>
+          <a:bodyPr wrap="square" rtlCol="0">
+            <a:spAutoFit/>
+          </a:bodyPr>
+          <a:lstStyle/>
+          <a:p>
+            <a:r>
+              <a:rPr lang="en-ZA" sz="2400" b="1" u="sng" dirty="0">
+                <a:effectLst>
+                  <a:outerShdw blurRad="38100" dist="38100" dir="2700000" algn="tl">
+                    <a:srgbClr val="000000">
+                      <a:alpha val="43137"/>
+                    </a:srgbClr>
+                  </a:outerShdw>
+                </a:effectLst>
+                <a:latin typeface="Aptos" panose="020B0004020202020204" pitchFamily="34" charset="0"/>
+              </a:rPr>
+              <a:t>How well the screen works</a:t>
+            </a:r>
+          </a:p>
+          <a:p>
+            <a:r>
+              <a:rPr lang="en-ZA" dirty="0">
+                <a:latin typeface="Aptos" panose="020B0004020202020204" pitchFamily="34" charset="0"/>
+              </a:rPr>
+              <a:t>Change the threshold and watch recall and referrals move</a:t>
+            </a:r>
+          </a:p>
+          <a:p>
+            <a:r>
+              <a:rPr lang="en-ZA" sz="2400" b="1" u="sng" dirty="0">
+                <a:latin typeface="Aptos" panose="020B0004020202020204" pitchFamily="34" charset="0"/>
+              </a:rPr>
+              <a:t>Who the screen misses</a:t>
+            </a:r>
+          </a:p>
+          <a:p>
+            <a:r>
+              <a:rPr lang="en-ZA" dirty="0">
+                <a:latin typeface="Aptos" panose="020B0004020202020204" pitchFamily="34" charset="0"/>
+              </a:rPr>
+              <a:t>Recall by income, grants and province, with intervals</a:t>
+            </a:r>
+          </a:p>
+          <a:p>
+            <a:r>
+              <a:rPr lang="en-ZA" sz="2400" b="1" u="sng" dirty="0">
+                <a:effectLst>
+                  <a:outerShdw blurRad="38100" dist="38100" dir="2700000" algn="tl">
+                    <a:srgbClr val="000000">
+                      <a:alpha val="43137"/>
+                    </a:srgbClr>
+                  </a:outerShdw>
+                </a:effectLst>
+                <a:latin typeface="Aptos" panose="020B0004020202020204" pitchFamily="34" charset="0"/>
+              </a:rPr>
+              <a:t>What drives risk</a:t>
+            </a:r>
+          </a:p>
+          <a:p>
+            <a:r>
+              <a:rPr lang="en-ZA" dirty="0">
+                <a:effectLst>
+                  <a:outerShdw blurRad="38100" dist="38100" dir="2700000" algn="tl">
+                    <a:srgbClr val="000000">
+                      <a:alpha val="43137"/>
+                    </a:srgbClr>
+                  </a:outerShdw>
+                </a:effectLst>
+                <a:latin typeface="Aptos" panose="020B0004020202020204" pitchFamily="34" charset="0"/>
+              </a:rPr>
+              <a:t>Income change first, odds ratios with 95% intervals</a:t>
+            </a:r>
+            <a:endParaRPr lang="en-ZA" dirty="0">
+              <a:latin typeface="Aptos" panose="020B0004020202020204" pitchFamily="34" charset="0"/>
+            </a:endParaRPr>
+          </a:p>
+        </p:txBody>
+      </p:sp>
+      <p:sp>
+        <p:nvSpPr>
+          <p:cNvPr id="7" name="TextBox 6">
+            <a:extLst>
+              <a:ext uri="{FF2B5EF4-FFF2-40B4-BE49-F238E27FC236}">
+                <a16:creationId xmlns:a16="http://schemas.microsoft.com/office/drawing/2014/main" id="{0F3B1B2A-8E7E-D69D-CCB1-A24D0C4A1ECE}"/>
+              </a:ext>
+            </a:extLst>
+          </p:cNvPr>
+          <p:cNvSpPr txBox="1"/>
+          <p:nvPr/>
+        </p:nvSpPr>
+        <p:spPr>
+          <a:xfrm>
+            <a:off x="1141413" y="5461000"/>
+            <a:ext cx="6194624" cy="400110"/>
+          </a:xfrm>
+          <a:prstGeom prst="rect">
+            <a:avLst/>
+          </a:prstGeom>
+          <a:noFill/>
+        </p:spPr>
+        <p:txBody>
+          <a:bodyPr wrap="square" rtlCol="0">
+            <a:spAutoFit/>
+          </a:bodyPr>
+          <a:lstStyle/>
+          <a:p>
+            <a:r>
+              <a:rPr lang="en-ZA" sz="1000" dirty="0"/>
+              <a:t>Backup screenshot: the 'How well the screen works' page at the deployed threshold of 0.24.</a:t>
+            </a:r>
+          </a:p>
+        </p:txBody>
+      </p:sp>
+      <p:sp>
+        <p:nvSpPr>
+          <p:cNvPr id="9" name="TextBox 8">
+            <a:extLst>
+              <a:ext uri="{FF2B5EF4-FFF2-40B4-BE49-F238E27FC236}">
+                <a16:creationId xmlns:a16="http://schemas.microsoft.com/office/drawing/2014/main" id="{CACA6238-8B81-7B10-6122-1E33CB7F4BD8}"/>
+              </a:ext>
+            </a:extLst>
+          </p:cNvPr>
+          <p:cNvSpPr txBox="1"/>
+          <p:nvPr/>
+        </p:nvSpPr>
+        <p:spPr>
+          <a:xfrm>
+            <a:off x="1141412" y="5848290"/>
+            <a:ext cx="6815137" cy="246221"/>
+          </a:xfrm>
+          <a:prstGeom prst="rect">
+            <a:avLst/>
+          </a:prstGeom>
+          <a:noFill/>
+        </p:spPr>
+        <p:txBody>
+          <a:bodyPr wrap="square">
+            <a:spAutoFit/>
+          </a:bodyPr>
+          <a:lstStyle/>
+          <a:p>
+            <a:r>
+              <a:rPr lang="en-ZA" sz="1000" dirty="0">
+                <a:latin typeface="Aptos" panose="020B0004020202020204" pitchFamily="34" charset="0"/>
+              </a:rPr>
+              <a:t>Live in Power BI, then over to Timothy for the Shiny app.</a:t>
+            </a:r>
+            <a:endParaRPr lang="en-ZA" sz="1000" dirty="0">
+              <a:latin typeface="Aptos" panose="020B0004020202020204" pitchFamily="34" charset="0"/>
+            </a:endParaRPr>
+          </a:p>
+        </p:txBody>
+      </p:sp>
+      <p:pic>
+        <p:nvPicPr>
+          <p:cNvPr id="10" name="Picture 9" descr="slide7_dashboard.jpg"/>
+          <p:cNvPicPr>
+            <a:picLocks noChangeAspect="1"/>
+          </p:cNvPicPr>
+          <p:nvPr/>
+        </p:nvPicPr>
+        <p:blipFill>
+          <a:blip r:embed="rId3"/>
+          <a:stretch>
+            <a:fillRect/>
+          </a:stretch>
+        </p:blipFill>
+        <p:spPr>
+          <a:xfrm>
+            <a:off x="1143000" y="2032000"/>
+            <a:ext cx="6096000" cy="3392924"/>
+          </a:xfrm>
+          <a:prstGeom prst="rect">
+            <a:avLst/>
+          </a:prstGeom>
+        </p:spPr>
+      </p:pic>
+    </p:spTree>
+    <p:extLst>
+      <p:ext uri="{BB962C8B-B14F-4D97-AF65-F5344CB8AC3E}">
+        <p14:creationId xmlns:p14="http://schemas.microsoft.com/office/powerpoint/2010/main" val="556620780"/>
+      </p:ext>
+    </p:extLst>
+  </p:cSld>
+  <p:clrMapOvr>
+    <a:masterClrMapping/>
+  </p:clrMapOvr>
+</p:sld>
+</file>
+
 <file path=ppt/theme/theme1.xml><?xml version="1.0" encoding="utf-8"?>
 <a:theme xmlns:a="http://schemas.openxmlformats.org/drawingml/2006/main" name="Mesh">
   <a:themeElements>
@@ -7332,4 +8895,324 @@
     </a:ext>
   </a:extLst>
 </a:theme>
+</file>
+
+<file path=ppt/theme/theme2.xml><?xml version="1.0" encoding="utf-8"?>
+<a:theme xmlns:a="http://schemas.openxmlformats.org/drawingml/2006/main" name="Office Theme">
+  <a:themeElements>
+    <a:clrScheme name="Office">
+      <a:dk1>
+        <a:sysClr val="windowText" lastClr="000000"/>
+      </a:dk1>
+      <a:lt1>
+        <a:sysClr val="window" lastClr="FFFFFF"/>
+      </a:lt1>
+      <a:dk2>
+        <a:srgbClr val="1F497D"/>
+      </a:dk2>
+      <a:lt2>
+        <a:srgbClr val="EEECE1"/>
+      </a:lt2>
+      <a:accent1>
+        <a:srgbClr val="4F81BD"/>
+      </a:accent1>
+      <a:accent2>
+        <a:srgbClr val="C0504D"/>
+      </a:accent2>
+      <a:accent3>
+        <a:srgbClr val="9BBB59"/>
+      </a:accent3>
+      <a:accent4>
+        <a:srgbClr val="8064A2"/>
+      </a:accent4>
+      <a:accent5>
+        <a:srgbClr val="4BACC6"/>
+      </a:accent5>
+      <a:accent6>
+        <a:srgbClr val="F79646"/>
+      </a:accent6>
+      <a:hlink>
+        <a:srgbClr val="0000FF"/>
+      </a:hlink>
+      <a:folHlink>
+        <a:srgbClr val="800080"/>
+      </a:folHlink>
+    </a:clrScheme>
+    <a:fontScheme name="Office">
+      <a:majorFont>
+        <a:latin typeface="Calibri"/>
+        <a:ea typeface=""/>
+        <a:cs typeface=""/>
+        <a:font script="Jpan" typeface="ＭＳ Ｐゴシック"/>
+        <a:font script="Hang" typeface="맑은 고딕"/>
+        <a:font script="Hans" typeface="宋体"/>
+        <a:font script="Hant" typeface="新細明體"/>
+        <a:font script="Arab" typeface="Times New Roman"/>
+        <a:font script="Hebr" typeface="Times New Roman"/>
+        <a:font script="Thai" typeface="Angsana New"/>
+        <a:font script="Ethi" typeface="Nyala"/>
+        <a:font script="Beng" typeface="Vrinda"/>
+        <a:font script="Gujr" typeface="Shruti"/>
+        <a:font script="Khmr" typeface="MoolBoran"/>
+        <a:font script="Knda" typeface="Tunga"/>
+        <a:font script="Guru" typeface="Raavi"/>
+        <a:font script="Cans" typeface="Euphemia"/>
+        <a:font script="Cher" typeface="Plantagenet Cherokee"/>
+        <a:font script="Yiii" typeface="Microsoft Yi Baiti"/>
+        <a:font script="Tibt" typeface="Microsoft Himalaya"/>
+        <a:font script="Thaa" typeface="MV Boli"/>
+        <a:font script="Deva" typeface="Mangal"/>
+        <a:font script="Telu" typeface="Gautami"/>
+        <a:font script="Taml" typeface="Latha"/>
+        <a:font script="Syrc" typeface="Estrangelo Edessa"/>
+        <a:font script="Orya" typeface="Kalinga"/>
+        <a:font script="Mlym" typeface="Kartika"/>
+        <a:font script="Laoo" typeface="DokChampa"/>
+        <a:font script="Sinh" typeface="Iskoola Pota"/>
+        <a:font script="Mong" typeface="Mongolian Baiti"/>
+        <a:font script="Viet" typeface="Times New Roman"/>
+        <a:font script="Uigh" typeface="Microsoft Uighur"/>
+        <a:font script="Geor" typeface="Sylfaen"/>
+      </a:majorFont>
+      <a:minorFont>
+        <a:latin typeface="Calibri"/>
+        <a:ea typeface=""/>
+        <a:cs typeface=""/>
+        <a:font script="Jpan" typeface="ＭＳ Ｐゴシック"/>
+        <a:font script="Hang" typeface="맑은 고딕"/>
+        <a:font script="Hans" typeface="宋体"/>
+        <a:font script="Hant" typeface="新細明體"/>
+        <a:font script="Arab" typeface="Arial"/>
+        <a:font script="Hebr" typeface="Arial"/>
+        <a:font script="Thai" typeface="Cordia New"/>
+        <a:font script="Ethi" typeface="Nyala"/>
+        <a:font script="Beng" typeface="Vrinda"/>
+        <a:font script="Gujr" typeface="Shruti"/>
+        <a:font script="Khmr" typeface="DaunPenh"/>
+        <a:font script="Knda" typeface="Tunga"/>
+        <a:font script="Guru" typeface="Raavi"/>
+        <a:font script="Cans" typeface="Euphemia"/>
+        <a:font script="Cher" typeface="Plantagenet Cherokee"/>
+        <a:font script="Yiii" typeface="Microsoft Yi Baiti"/>
+        <a:font script="Tibt" typeface="Microsoft Himalaya"/>
+        <a:font script="Thaa" typeface="MV Boli"/>
+        <a:font script="Deva" typeface="Mangal"/>
+        <a:font script="Telu" typeface="Gautami"/>
+        <a:font script="Taml" typeface="Latha"/>
+        <a:font script="Syrc" typeface="Estrangelo Edessa"/>
+        <a:font script="Orya" typeface="Kalinga"/>
+        <a:font script="Mlym" typeface="Kartika"/>
+        <a:font script="Laoo" typeface="DokChampa"/>
+        <a:font script="Sinh" typeface="Iskoola Pota"/>
+        <a:font script="Mong" typeface="Mongolian Baiti"/>
+        <a:font script="Viet" typeface="Arial"/>
+        <a:font script="Uigh" typeface="Microsoft Uighur"/>
+        <a:font script="Geor" typeface="Sylfaen"/>
+      </a:minorFont>
+    </a:fontScheme>
+    <a:fmtScheme name="Office">
+      <a:fillStyleLst>
+        <a:solidFill>
+          <a:schemeClr val="phClr"/>
+        </a:solidFill>
+        <a:gradFill rotWithShape="1">
+          <a:gsLst>
+            <a:gs pos="0">
+              <a:schemeClr val="phClr">
+                <a:tint val="50000"/>
+                <a:satMod val="300000"/>
+              </a:schemeClr>
+            </a:gs>
+            <a:gs pos="35000">
+              <a:schemeClr val="phClr">
+                <a:tint val="37000"/>
+                <a:satMod val="300000"/>
+              </a:schemeClr>
+            </a:gs>
+            <a:gs pos="100000">
+              <a:schemeClr val="phClr">
+                <a:tint val="15000"/>
+                <a:satMod val="350000"/>
+              </a:schemeClr>
+            </a:gs>
+          </a:gsLst>
+          <a:lin ang="16200000" scaled="1"/>
+        </a:gradFill>
+        <a:gradFill rotWithShape="1">
+          <a:gsLst>
+            <a:gs pos="0">
+              <a:schemeClr val="phClr">
+                <a:tint val="100000"/>
+                <a:shade val="100000"/>
+                <a:satMod val="130000"/>
+              </a:schemeClr>
+            </a:gs>
+            <a:gs pos="100000">
+              <a:schemeClr val="phClr">
+                <a:tint val="50000"/>
+                <a:shade val="100000"/>
+                <a:satMod val="350000"/>
+              </a:schemeClr>
+            </a:gs>
+          </a:gsLst>
+          <a:lin ang="16200000" scaled="0"/>
+        </a:gradFill>
+      </a:fillStyleLst>
+      <a:lnStyleLst>
+        <a:ln w="9525" cap="flat" cmpd="sng" algn="ctr">
+          <a:solidFill>
+            <a:schemeClr val="phClr">
+              <a:shade val="95000"/>
+              <a:satMod val="105000"/>
+            </a:schemeClr>
+          </a:solidFill>
+          <a:prstDash val="solid"/>
+        </a:ln>
+        <a:ln w="25400" cap="flat" cmpd="sng" algn="ctr">
+          <a:solidFill>
+            <a:schemeClr val="phClr"/>
+          </a:solidFill>
+          <a:prstDash val="solid"/>
+        </a:ln>
+        <a:ln w="38100" cap="flat" cmpd="sng" algn="ctr">
+          <a:solidFill>
+            <a:schemeClr val="phClr"/>
+          </a:solidFill>
+          <a:prstDash val="solid"/>
+        </a:ln>
+      </a:lnStyleLst>
+      <a:effectStyleLst>
+        <a:effectStyle>
+          <a:effectLst>
+            <a:outerShdw blurRad="40000" dist="20000" dir="5400000" rotWithShape="0">
+              <a:srgbClr val="000000">
+                <a:alpha val="38000"/>
+              </a:srgbClr>
+            </a:outerShdw>
+          </a:effectLst>
+        </a:effectStyle>
+        <a:effectStyle>
+          <a:effectLst>
+            <a:outerShdw blurRad="40000" dist="23000" dir="5400000" rotWithShape="0">
+              <a:srgbClr val="000000">
+                <a:alpha val="35000"/>
+              </a:srgbClr>
+            </a:outerShdw>
+          </a:effectLst>
+        </a:effectStyle>
+        <a:effectStyle>
+          <a:effectLst>
+            <a:outerShdw blurRad="40000" dist="23000" dir="5400000" rotWithShape="0">
+              <a:srgbClr val="000000">
+                <a:alpha val="35000"/>
+              </a:srgbClr>
+            </a:outerShdw>
+          </a:effectLst>
+          <a:scene3d>
+            <a:camera prst="orthographicFront">
+              <a:rot lat="0" lon="0" rev="0"/>
+            </a:camera>
+            <a:lightRig rig="threePt" dir="t">
+              <a:rot lat="0" lon="0" rev="1200000"/>
+            </a:lightRig>
+          </a:scene3d>
+          <a:sp3d>
+            <a:bevelT w="63500" h="25400"/>
+          </a:sp3d>
+        </a:effectStyle>
+      </a:effectStyleLst>
+      <a:bgFillStyleLst>
+        <a:solidFill>
+          <a:schemeClr val="phClr"/>
+        </a:solidFill>
+        <a:gradFill rotWithShape="1">
+          <a:gsLst>
+            <a:gs pos="0">
+              <a:schemeClr val="phClr">
+                <a:tint val="40000"/>
+                <a:satMod val="350000"/>
+              </a:schemeClr>
+            </a:gs>
+            <a:gs pos="40000">
+              <a:schemeClr val="phClr">
+                <a:tint val="45000"/>
+                <a:shade val="99000"/>
+                <a:satMod val="350000"/>
+              </a:schemeClr>
+            </a:gs>
+            <a:gs pos="100000">
+              <a:schemeClr val="phClr">
+                <a:shade val="20000"/>
+                <a:satMod val="255000"/>
+              </a:schemeClr>
+            </a:gs>
+          </a:gsLst>
+          <a:path path="circle">
+            <a:fillToRect l="50000" t="-80000" r="50000" b="180000"/>
+          </a:path>
+        </a:gradFill>
+        <a:gradFill rotWithShape="1">
+          <a:gsLst>
+            <a:gs pos="0">
+              <a:schemeClr val="phClr">
+                <a:tint val="80000"/>
+                <a:satMod val="300000"/>
+              </a:schemeClr>
+            </a:gs>
+            <a:gs pos="100000">
+              <a:schemeClr val="phClr">
+                <a:shade val="30000"/>
+                <a:satMod val="200000"/>
+              </a:schemeClr>
+            </a:gs>
+          </a:gsLst>
+          <a:path path="circle">
+            <a:fillToRect l="50000" t="50000" r="50000" b="50000"/>
+          </a:path>
+        </a:gradFill>
+      </a:bgFillStyleLst>
+    </a:fmtScheme>
+  </a:themeElements>
+  <a:objectDefaults>
+    <a:spDef>
+      <a:spPr/>
+      <a:bodyPr/>
+      <a:lstStyle/>
+      <a:style>
+        <a:lnRef idx="1">
+          <a:schemeClr val="accent1"/>
+        </a:lnRef>
+        <a:fillRef idx="3">
+          <a:schemeClr val="accent1"/>
+        </a:fillRef>
+        <a:effectRef idx="2">
+          <a:schemeClr val="accent1"/>
+        </a:effectRef>
+        <a:fontRef idx="minor">
+          <a:schemeClr val="lt1"/>
+        </a:fontRef>
+      </a:style>
+    </a:spDef>
+    <a:lnDef>
+      <a:spPr/>
+      <a:bodyPr/>
+      <a:lstStyle/>
+      <a:style>
+        <a:lnRef idx="2">
+          <a:schemeClr val="accent1"/>
+        </a:lnRef>
+        <a:fillRef idx="0">
+          <a:schemeClr val="accent1"/>
+        </a:fillRef>
+        <a:effectRef idx="1">
+          <a:schemeClr val="accent1"/>
+        </a:effectRef>
+        <a:fontRef idx="minor">
+          <a:schemeClr val="tx1"/>
+        </a:fontRef>
+      </a:style>
+    </a:lnDef>
+  </a:objectDefaults>
+  <a:extraClrSchemeLst/>
+</a:theme>
 </file>
--- a/report/M4/BIN381_M4_PersonA_Slides_1_4.pptx
+++ b/report/M4/BIN381_M4_PersonA_Slides_1_4.pptx
@@ -4,14 +4,17 @@
   <p:sldMasterIdLst>
     <p:sldMasterId id="2147483660" r:id="rId1"/>
   </p:sldMasterIdLst>
+  <p:notesMasterIdLst>
+    <p:notesMasterId r:id="rId9"/>
+  </p:notesMasterIdLst>
   <p:sldIdLst>
     <p:sldId id="256" r:id="rId2"/>
     <p:sldId id="257" r:id="rId3"/>
     <p:sldId id="258" r:id="rId4"/>
     <p:sldId id="259" r:id="rId5"/>
-    <p:sldId id="260" r:id="rId12"/>
-    <p:sldId id="261" r:id="rId13"/>
-    <p:sldId id="262" r:id="rId14"/>
+    <p:sldId id="260" r:id="rId6"/>
+    <p:sldId id="261" r:id="rId7"/>
+    <p:sldId id="262" r:id="rId8"/>
   </p:sldIdLst>
   <p:sldSz cx="12192000" cy="6858000"/>
   <p:notesSz cx="6858000" cy="9144000"/>
@@ -110,6 +113,11 @@
       </a:defRPr>
     </a:lvl9pPr>
   </p:defaultTextStyle>
+  <p:extLst>
+    <p:ext uri="{EFAFB233-063F-42B5-8137-9DF3F51BA10A}">
+      <p15:sldGuideLst xmlns:p15="http://schemas.microsoft.com/office/powerpoint/2012/main"/>
+    </p:ext>
+  </p:extLst>
 </p:presentation>
 </file>
 
@@ -190,7 +198,7 @@
 </file>
 
 <file path=ppt/notesMasters/notesMaster1.xml><?xml version="1.0" encoding="utf-8"?>
-<p:notesMaster xmlns:a="http://schemas.openxmlformats.org/drawingml/2006/main" xmlns:p="http://schemas.openxmlformats.org/presentationml/2006/main" xmlns:r="http://schemas.openxmlformats.org/officeDocument/2006/relationships">
+<p:notesMaster xmlns:a="http://schemas.openxmlformats.org/drawingml/2006/main" xmlns:r="http://schemas.openxmlformats.org/officeDocument/2006/relationships" xmlns:p="http://schemas.openxmlformats.org/presentationml/2006/main">
   <p:cSld>
     <p:bg>
       <p:bgRef idx="1001">
@@ -224,7 +232,7 @@
         <p:spPr>
           <a:xfrm>
             <a:off x="0" y="0"/>
-            <a:ext cx="2971800" cy="457200"/>
+            <a:ext cx="2971800" cy="458788"/>
           </a:xfrm>
           <a:prstGeom prst="rect">
             <a:avLst/>
@@ -238,7 +246,7 @@
             </a:lvl1pPr>
           </a:lstStyle>
           <a:p>
-            <a:endParaRPr lang="en-US"/>
+            <a:endParaRPr lang="en-ZA"/>
           </a:p>
         </p:txBody>
       </p:sp>
@@ -255,7 +263,7 @@
         <p:spPr>
           <a:xfrm>
             <a:off x="3884613" y="0"/>
-            <a:ext cx="2971800" cy="457200"/>
+            <a:ext cx="2971800" cy="458788"/>
           </a:xfrm>
           <a:prstGeom prst="rect">
             <a:avLst/>
@@ -269,11 +277,11 @@
             </a:lvl1pPr>
           </a:lstStyle>
           <a:p>
-            <a:fld id="{0F89C1C7-3DCD-1040-A9CF-14679D8B5DDD}" type="datetimeFigureOut">
-              <a:rPr lang="en-US" smtClean="0"/>
-              <a:t>10/17/16</a:t>
+            <a:fld id="{A02FBB2A-DAF9-4AD8-8DE3-EACB38669FBE}" type="datetimeFigureOut">
+              <a:rPr lang="en-ZA" smtClean="0"/>
+              <a:t>19 Oct 2026</a:t>
             </a:fld>
-            <a:endParaRPr lang="en-US"/>
+            <a:endParaRPr lang="en-ZA"/>
           </a:p>
         </p:txBody>
       </p:sp>
@@ -289,8 +297,8 @@
         </p:nvSpPr>
         <p:spPr>
           <a:xfrm>
-            <a:off x="1143000" y="685800"/>
-            <a:ext cx="4572000" cy="3429000"/>
+            <a:off x="685800" y="1143000"/>
+            <a:ext cx="5486400" cy="3086100"/>
           </a:xfrm>
           <a:prstGeom prst="rect">
             <a:avLst/>
@@ -306,7 +314,7 @@
           <a:bodyPr vert="horz" lIns="91440" tIns="45720" rIns="91440" bIns="45720" rtlCol="0" anchor="ctr"/>
           <a:lstStyle/>
           <a:p>
-            <a:endParaRPr lang="en-US"/>
+            <a:endParaRPr lang="en-ZA"/>
           </a:p>
         </p:txBody>
       </p:sp>
@@ -322,8 +330,8 @@
         </p:nvSpPr>
         <p:spPr>
           <a:xfrm>
-            <a:off x="685800" y="4343400"/>
-            <a:ext cx="5486400" cy="4114800"/>
+            <a:off x="685800" y="4400550"/>
+            <a:ext cx="5486400" cy="3600450"/>
           </a:xfrm>
           <a:prstGeom prst="rect">
             <a:avLst/>
@@ -335,38 +343,38 @@
           <a:p>
             <a:pPr lvl="0"/>
             <a:r>
-              <a:rPr lang="en-US" smtClean="0"/>
+              <a:rPr lang="en-GB"/>
               <a:t>Click to edit Master text styles</a:t>
             </a:r>
           </a:p>
           <a:p>
             <a:pPr lvl="1"/>
             <a:r>
-              <a:rPr lang="en-US" smtClean="0"/>
+              <a:rPr lang="en-GB"/>
               <a:t>Second level</a:t>
             </a:r>
           </a:p>
           <a:p>
             <a:pPr lvl="2"/>
             <a:r>
-              <a:rPr lang="en-US" smtClean="0"/>
+              <a:rPr lang="en-GB"/>
               <a:t>Third level</a:t>
             </a:r>
           </a:p>
           <a:p>
             <a:pPr lvl="3"/>
             <a:r>
-              <a:rPr lang="en-US" smtClean="0"/>
+              <a:rPr lang="en-GB"/>
               <a:t>Fourth level</a:t>
             </a:r>
           </a:p>
           <a:p>
             <a:pPr lvl="4"/>
             <a:r>
-              <a:rPr lang="en-US" smtClean="0"/>
+              <a:rPr lang="en-GB"/>
               <a:t>Fifth level</a:t>
             </a:r>
-            <a:endParaRPr lang="en-US"/>
+            <a:endParaRPr lang="en-ZA"/>
           </a:p>
         </p:txBody>
       </p:sp>
@@ -383,7 +391,7 @@
         <p:spPr>
           <a:xfrm>
             <a:off x="0" y="8685213"/>
-            <a:ext cx="2971800" cy="457200"/>
+            <a:ext cx="2971800" cy="458787"/>
           </a:xfrm>
           <a:prstGeom prst="rect">
             <a:avLst/>
@@ -397,7 +405,7 @@
             </a:lvl1pPr>
           </a:lstStyle>
           <a:p>
-            <a:endParaRPr lang="en-US"/>
+            <a:endParaRPr lang="en-ZA"/>
           </a:p>
         </p:txBody>
       </p:sp>
@@ -414,7 +422,7 @@
         <p:spPr>
           <a:xfrm>
             <a:off x="3884613" y="8685213"/>
-            <a:ext cx="2971800" cy="457200"/>
+            <a:ext cx="2971800" cy="458787"/>
           </a:xfrm>
           <a:prstGeom prst="rect">
             <a:avLst/>
@@ -428,24 +436,24 @@
             </a:lvl1pPr>
           </a:lstStyle>
           <a:p>
-            <a:fld id="{BB5E49A5-4136-284D-997B-48E1D791AD67}" type="slidenum">
-              <a:rPr lang="en-US" smtClean="0"/>
+            <a:fld id="{EBA3DAEE-C2EF-4232-9F1C-BB47C51AA44A}" type="slidenum">
+              <a:rPr lang="en-ZA" smtClean="0"/>
               <a:t>‹#›</a:t>
             </a:fld>
-            <a:endParaRPr lang="en-US"/>
+            <a:endParaRPr lang="en-ZA"/>
           </a:p>
         </p:txBody>
       </p:sp>
     </p:spTree>
     <p:extLst>
       <p:ext uri="{BB962C8B-B14F-4D97-AF65-F5344CB8AC3E}">
-        <p14:creationId xmlns:p14="http://schemas.microsoft.com/office/powerpoint/2010/main" val="2623252185"/>
+        <p14:creationId xmlns:p14="http://schemas.microsoft.com/office/powerpoint/2010/main" val="3806193779"/>
       </p:ext>
     </p:extLst>
   </p:cSld>
   <p:clrMap bg1="lt1" tx1="dk1" bg2="lt2" tx2="dk2" accent1="accent1" accent2="accent2" accent3="accent3" accent4="accent4" accent5="accent5" accent6="accent6" hlink="hlink" folHlink="folHlink"/>
   <p:notesStyle>
-    <a:lvl1pPr marL="0" algn="l" defTabSz="457200" rtl="0" eaLnBrk="1" latinLnBrk="0" hangingPunct="1">
+    <a:lvl1pPr marL="0" algn="l" defTabSz="914400" rtl="0" eaLnBrk="1" latinLnBrk="0" hangingPunct="1">
       <a:defRPr sz="1200" kern="1200">
         <a:solidFill>
           <a:schemeClr val="tx1"/>
@@ -455,7 +463,7 @@
         <a:cs typeface="+mn-cs"/>
       </a:defRPr>
     </a:lvl1pPr>
-    <a:lvl2pPr marL="457200" algn="l" defTabSz="457200" rtl="0" eaLnBrk="1" latinLnBrk="0" hangingPunct="1">
+    <a:lvl2pPr marL="457200" algn="l" defTabSz="914400" rtl="0" eaLnBrk="1" latinLnBrk="0" hangingPunct="1">
       <a:defRPr sz="1200" kern="1200">
         <a:solidFill>
           <a:schemeClr val="tx1"/>
@@ -465,7 +473,7 @@
         <a:cs typeface="+mn-cs"/>
       </a:defRPr>
     </a:lvl2pPr>
-    <a:lvl3pPr marL="914400" algn="l" defTabSz="457200" rtl="0" eaLnBrk="1" latinLnBrk="0" hangingPunct="1">
+    <a:lvl3pPr marL="914400" algn="l" defTabSz="914400" rtl="0" eaLnBrk="1" latinLnBrk="0" hangingPunct="1">
       <a:defRPr sz="1200" kern="1200">
         <a:solidFill>
           <a:schemeClr val="tx1"/>
@@ -475,7 +483,7 @@
         <a:cs typeface="+mn-cs"/>
       </a:defRPr>
     </a:lvl3pPr>
-    <a:lvl4pPr marL="1371600" algn="l" defTabSz="457200" rtl="0" eaLnBrk="1" latinLnBrk="0" hangingPunct="1">
+    <a:lvl4pPr marL="1371600" algn="l" defTabSz="914400" rtl="0" eaLnBrk="1" latinLnBrk="0" hangingPunct="1">
       <a:defRPr sz="1200" kern="1200">
         <a:solidFill>
           <a:schemeClr val="tx1"/>
@@ -485,7 +493,7 @@
         <a:cs typeface="+mn-cs"/>
       </a:defRPr>
     </a:lvl4pPr>
-    <a:lvl5pPr marL="1828800" algn="l" defTabSz="457200" rtl="0" eaLnBrk="1" latinLnBrk="0" hangingPunct="1">
+    <a:lvl5pPr marL="1828800" algn="l" defTabSz="914400" rtl="0" eaLnBrk="1" latinLnBrk="0" hangingPunct="1">
       <a:defRPr sz="1200" kern="1200">
         <a:solidFill>
           <a:schemeClr val="tx1"/>
@@ -495,7 +503,7 @@
         <a:cs typeface="+mn-cs"/>
       </a:defRPr>
     </a:lvl5pPr>
-    <a:lvl6pPr marL="2286000" algn="l" defTabSz="457200" rtl="0" eaLnBrk="1" latinLnBrk="0" hangingPunct="1">
+    <a:lvl6pPr marL="2286000" algn="l" defTabSz="914400" rtl="0" eaLnBrk="1" latinLnBrk="0" hangingPunct="1">
       <a:defRPr sz="1200" kern="1200">
         <a:solidFill>
           <a:schemeClr val="tx1"/>
@@ -505,7 +513,7 @@
         <a:cs typeface="+mn-cs"/>
       </a:defRPr>
     </a:lvl6pPr>
-    <a:lvl7pPr marL="2743200" algn="l" defTabSz="457200" rtl="0" eaLnBrk="1" latinLnBrk="0" hangingPunct="1">
+    <a:lvl7pPr marL="2743200" algn="l" defTabSz="914400" rtl="0" eaLnBrk="1" latinLnBrk="0" hangingPunct="1">
       <a:defRPr sz="1200" kern="1200">
         <a:solidFill>
           <a:schemeClr val="tx1"/>
@@ -515,7 +523,7 @@
         <a:cs typeface="+mn-cs"/>
       </a:defRPr>
     </a:lvl7pPr>
-    <a:lvl8pPr marL="3200400" algn="l" defTabSz="457200" rtl="0" eaLnBrk="1" latinLnBrk="0" hangingPunct="1">
+    <a:lvl8pPr marL="3200400" algn="l" defTabSz="914400" rtl="0" eaLnBrk="1" latinLnBrk="0" hangingPunct="1">
       <a:defRPr sz="1200" kern="1200">
         <a:solidFill>
           <a:schemeClr val="tx1"/>
@@ -525,7 +533,7 @@
         <a:cs typeface="+mn-cs"/>
       </a:defRPr>
     </a:lvl8pPr>
-    <a:lvl9pPr marL="3657600" algn="l" defTabSz="457200" rtl="0" eaLnBrk="1" latinLnBrk="0" hangingPunct="1">
+    <a:lvl9pPr marL="3657600" algn="l" defTabSz="914400" rtl="0" eaLnBrk="1" latinLnBrk="0" hangingPunct="1">
       <a:defRPr sz="1200" kern="1200">
         <a:solidFill>
           <a:schemeClr val="tx1"/>
@@ -540,7 +548,7 @@
 </file>
 
 <file path=ppt/notesSlides/notesSlide1.xml><?xml version="1.0" encoding="utf-8"?>
-<p:notes xmlns:a="http://schemas.openxmlformats.org/drawingml/2006/main" xmlns:p="http://schemas.openxmlformats.org/presentationml/2006/main" xmlns:r="http://schemas.openxmlformats.org/officeDocument/2006/relationships">
+<p:notes xmlns:a="http://schemas.openxmlformats.org/drawingml/2006/main" xmlns:r="http://schemas.openxmlformats.org/officeDocument/2006/relationships" xmlns:p="http://schemas.openxmlformats.org/presentationml/2006/main">
   <p:cSld>
     <p:spTree>
       <p:nvGrpSpPr>
@@ -560,7 +568,7 @@
         <p:nvSpPr>
           <p:cNvPr id="2" name="Slide Image Placeholder 1"/>
           <p:cNvSpPr>
-            <a:spLocks noGrp="1"/>
+            <a:spLocks noGrp="1" noRot="1" noChangeAspect="1"/>
           </p:cNvSpPr>
           <p:nvPr>
             <p:ph type="sldImg" idx="2"/>
@@ -575,7 +583,7 @@
             <a:spLocks noGrp="1"/>
           </p:cNvSpPr>
           <p:nvPr>
-            <p:ph type="body" idx="3" sz="quarter"/>
+            <p:ph type="body" sz="quarter" idx="3"/>
           </p:nvPr>
         </p:nvSpPr>
         <p:spPr/>
@@ -587,13 +595,17 @@
               <a:t>We chose the threshold before we looked at the test data, with a rule agreed up front: find at least 80% of at-risk households at the fewest referrals. That lands on 0.24. On data the model had never seen it finds 80.7% of at-risk households, and 85.7% of the severely food insecure.</a:t>
             </a:r>
           </a:p>
-          <a:p/>
+          <a:p>
+            <a:endParaRPr/>
+          </a:p>
           <a:p>
             <a:r>
               <a:t>The cost is the orange line. Four in ten referrals turn out to be food secure, and we send three in five households for follow-up. That is a dial, not a fact: raise the threshold and you visit fewer households but miss more. The dashboard lets programme managers set it against the capacity they actually have.</a:t>
             </a:r>
           </a:p>
-          <a:p/>
+          <a:p>
+            <a:endParaRPr/>
+          </a:p>
           <a:p>
             <a:r>
               <a:t>A random forest scored slightly better (about 0.009 AUC). We kept the logistic model because every referral has to be explained to an official, and it gives one interpretable odds ratio per factor.</a:t>
@@ -608,7 +620,7 @@
             <a:spLocks noGrp="1"/>
           </p:cNvSpPr>
           <p:nvPr>
-            <p:ph type="sldNum" idx="5" sz="quarter"/>
+            <p:ph type="sldNum" sz="quarter" idx="5"/>
           </p:nvPr>
         </p:nvSpPr>
         <p:spPr/>
@@ -622,7 +634,7 @@
 </file>
 
 <file path=ppt/notesSlides/notesSlide2.xml><?xml version="1.0" encoding="utf-8"?>
-<p:notes xmlns:a="http://schemas.openxmlformats.org/drawingml/2006/main" xmlns:p="http://schemas.openxmlformats.org/presentationml/2006/main" xmlns:r="http://schemas.openxmlformats.org/officeDocument/2006/relationships">
+<p:notes xmlns:a="http://schemas.openxmlformats.org/drawingml/2006/main" xmlns:r="http://schemas.openxmlformats.org/officeDocument/2006/relationships" xmlns:p="http://schemas.openxmlformats.org/presentationml/2006/main">
   <p:cSld>
     <p:spTree>
       <p:nvGrpSpPr>
@@ -642,7 +654,7 @@
         <p:nvSpPr>
           <p:cNvPr id="2" name="Slide Image Placeholder 1"/>
           <p:cNvSpPr>
-            <a:spLocks noGrp="1"/>
+            <a:spLocks noGrp="1" noRot="1" noChangeAspect="1"/>
           </p:cNvSpPr>
           <p:nvPr>
             <p:ph type="sldImg" idx="2"/>
@@ -657,7 +669,7 @@
             <a:spLocks noGrp="1"/>
           </p:cNvSpPr>
           <p:nvPr>
-            <p:ph type="body" idx="3" sz="quarter"/>
+            <p:ph type="body" sz="quarter" idx="3"/>
           </p:nvPr>
         </p:nvSpPr>
         <p:spPr/>
@@ -669,13 +681,17 @@
               <a:t>The strongest single signal is not income level, it is income change. Whether a household is worse off than a year ago matters about two and a half times more than any other answer, and it can be asked at intake in one sentence.</a:t>
             </a:r>
           </a:p>
-          <a:p/>
+          <a:p>
+            <a:endParaRPr/>
+          </a:p>
           <a:p>
             <a:r>
               <a:t>Grant households are more food insecure, not less: 37.6% against 20.6%. That is not evidence that grants cause harm. Grants are means-tested, so they mark households that were already poor, and one survey wave cannot separate targeting from effect.</a:t>
             </a:r>
           </a:p>
-          <a:p/>
+          <a:p>
+            <a:endParaRPr/>
+          </a:p>
           <a:p>
             <a:r>
               <a:t>The right-hand chart is the honest limitation. The screen finds 94% of at-risk households earning under R2,500 and only 39% above R11,500. It is weakest exactly where food insecurity is least expected, so a lower-risk result is not clearance, and self-referral stays open.</a:t>
@@ -690,7 +706,7 @@
             <a:spLocks noGrp="1"/>
           </p:cNvSpPr>
           <p:nvPr>
-            <p:ph type="sldNum" idx="5" sz="quarter"/>
+            <p:ph type="sldNum" sz="quarter" idx="5"/>
           </p:nvPr>
         </p:nvSpPr>
         <p:spPr/>
@@ -704,7 +720,7 @@
 </file>
 
 <file path=ppt/notesSlides/notesSlide3.xml><?xml version="1.0" encoding="utf-8"?>
-<p:notes xmlns:a="http://schemas.openxmlformats.org/drawingml/2006/main" xmlns:p="http://schemas.openxmlformats.org/presentationml/2006/main" xmlns:r="http://schemas.openxmlformats.org/officeDocument/2006/relationships">
+<p:notes xmlns:a="http://schemas.openxmlformats.org/drawingml/2006/main" xmlns:r="http://schemas.openxmlformats.org/officeDocument/2006/relationships" xmlns:p="http://schemas.openxmlformats.org/presentationml/2006/main">
   <p:cSld>
     <p:spTree>
       <p:nvGrpSpPr>
@@ -724,7 +740,7 @@
         <p:nvSpPr>
           <p:cNvPr id="2" name="Slide Image Placeholder 1"/>
           <p:cNvSpPr>
-            <a:spLocks noGrp="1"/>
+            <a:spLocks noGrp="1" noRot="1" noChangeAspect="1"/>
           </p:cNvSpPr>
           <p:nvPr>
             <p:ph type="sldImg" idx="2"/>
@@ -739,7 +755,7 @@
             <a:spLocks noGrp="1"/>
           </p:cNvSpPr>
           <p:nvPr>
-            <p:ph type="body" idx="3" sz="quarter"/>
+            <p:ph type="body" sz="quarter" idx="3"/>
           </p:nvPr>
         </p:nvSpPr>
         <p:spPr/>
@@ -795,7 +811,7 @@
             <a:spLocks noGrp="1"/>
           </p:cNvSpPr>
           <p:nvPr>
-            <p:ph type="sldNum" idx="5" sz="quarter"/>
+            <p:ph type="sldNum" sz="quarter" idx="5"/>
           </p:nvPr>
         </p:nvSpPr>
         <p:spPr/>
@@ -6569,7 +6585,7 @@
               <a:rPr lang="en-ZA" sz="3600" dirty="0">
                 <a:latin typeface="Aptos" panose="020B0004020202020204" pitchFamily="34" charset="0"/>
               </a:rPr>
-              <a:t>30.6%</a:t>
+              <a:t>28.3%</a:t>
             </a:r>
           </a:p>
           <a:p>
@@ -8298,9 +8314,6 @@
               </a:rPr>
               <a:t>58.3% of households whose income fell sharply are food insecure, against 18-21% mid-scale.</a:t>
             </a:r>
-            <a:endParaRPr lang="en-ZA" sz="1000" dirty="0">
-              <a:latin typeface="Aptos" panose="020B0004020202020204" pitchFamily="34" charset="0"/>
-            </a:endParaRPr>
           </a:p>
         </p:txBody>
       </p:sp>
@@ -8598,9 +8611,6 @@
               </a:rPr>
               <a:t>Live in Power BI, then over to Timothy for the Shiny app.</a:t>
             </a:r>
-            <a:endParaRPr lang="en-ZA" sz="1000" dirty="0">
-              <a:latin typeface="Aptos" panose="020B0004020202020204" pitchFamily="34" charset="0"/>
-            </a:endParaRPr>
           </a:p>
         </p:txBody>
       </p:sp>
@@ -8908,44 +8918,44 @@
         <a:sysClr val="window" lastClr="FFFFFF"/>
       </a:lt1>
       <a:dk2>
-        <a:srgbClr val="1F497D"/>
+        <a:srgbClr val="0E2841"/>
       </a:dk2>
       <a:lt2>
-        <a:srgbClr val="EEECE1"/>
+        <a:srgbClr val="E8E8E8"/>
       </a:lt2>
       <a:accent1>
-        <a:srgbClr val="4F81BD"/>
+        <a:srgbClr val="156082"/>
       </a:accent1>
       <a:accent2>
-        <a:srgbClr val="C0504D"/>
+        <a:srgbClr val="E97132"/>
       </a:accent2>
       <a:accent3>
-        <a:srgbClr val="9BBB59"/>
+        <a:srgbClr val="196B24"/>
       </a:accent3>
       <a:accent4>
-        <a:srgbClr val="8064A2"/>
+        <a:srgbClr val="0F9ED5"/>
       </a:accent4>
       <a:accent5>
-        <a:srgbClr val="4BACC6"/>
+        <a:srgbClr val="A02B93"/>
       </a:accent5>
       <a:accent6>
-        <a:srgbClr val="F79646"/>
+        <a:srgbClr val="4EA72E"/>
       </a:accent6>
       <a:hlink>
-        <a:srgbClr val="0000FF"/>
+        <a:srgbClr val="467886"/>
       </a:hlink>
       <a:folHlink>
-        <a:srgbClr val="800080"/>
+        <a:srgbClr val="96607D"/>
       </a:folHlink>
     </a:clrScheme>
     <a:fontScheme name="Office">
       <a:majorFont>
-        <a:latin typeface="Calibri"/>
+        <a:latin typeface="Aptos Display" panose="02110004020202020204"/>
         <a:ea typeface=""/>
         <a:cs typeface=""/>
-        <a:font script="Jpan" typeface="ＭＳ Ｐゴシック"/>
+        <a:font script="Jpan" typeface="游ゴシック Light"/>
         <a:font script="Hang" typeface="맑은 고딕"/>
-        <a:font script="Hans" typeface="宋体"/>
+        <a:font script="Hans" typeface="等线 Light"/>
         <a:font script="Hant" typeface="新細明體"/>
         <a:font script="Arab" typeface="Times New Roman"/>
         <a:font script="Hebr" typeface="Times New Roman"/>
@@ -8973,14 +8983,31 @@
         <a:font script="Viet" typeface="Times New Roman"/>
         <a:font script="Uigh" typeface="Microsoft Uighur"/>
         <a:font script="Geor" typeface="Sylfaen"/>
+        <a:font script="Armn" typeface="Arial"/>
+        <a:font script="Bugi" typeface="Leelawadee UI"/>
+        <a:font script="Bopo" typeface="Microsoft JhengHei"/>
+        <a:font script="Java" typeface="Javanese Text"/>
+        <a:font script="Lisu" typeface="Segoe UI"/>
+        <a:font script="Mymr" typeface="Myanmar Text"/>
+        <a:font script="Nkoo" typeface="Ebrima"/>
+        <a:font script="Olck" typeface="Nirmala UI"/>
+        <a:font script="Osma" typeface="Ebrima"/>
+        <a:font script="Phag" typeface="Phagspa"/>
+        <a:font script="Syrn" typeface="Estrangelo Edessa"/>
+        <a:font script="Syrj" typeface="Estrangelo Edessa"/>
+        <a:font script="Syre" typeface="Estrangelo Edessa"/>
+        <a:font script="Sora" typeface="Nirmala UI"/>
+        <a:font script="Tale" typeface="Microsoft Tai Le"/>
+        <a:font script="Talu" typeface="Microsoft New Tai Lue"/>
+        <a:font script="Tfng" typeface="Ebrima"/>
       </a:majorFont>
       <a:minorFont>
-        <a:latin typeface="Calibri"/>
+        <a:latin typeface="Aptos" panose="02110004020202020204"/>
         <a:ea typeface=""/>
         <a:cs typeface=""/>
-        <a:font script="Jpan" typeface="ＭＳ Ｐゴシック"/>
+        <a:font script="Jpan" typeface="游ゴシック"/>
         <a:font script="Hang" typeface="맑은 고딕"/>
-        <a:font script="Hans" typeface="宋体"/>
+        <a:font script="Hans" typeface="等线"/>
         <a:font script="Hant" typeface="新細明體"/>
         <a:font script="Arab" typeface="Arial"/>
         <a:font script="Hebr" typeface="Arial"/>
@@ -9008,6 +9035,23 @@
         <a:font script="Viet" typeface="Arial"/>
         <a:font script="Uigh" typeface="Microsoft Uighur"/>
         <a:font script="Geor" typeface="Sylfaen"/>
+        <a:font script="Armn" typeface="Arial"/>
+        <a:font script="Bugi" typeface="Leelawadee UI"/>
+        <a:font script="Bopo" typeface="Microsoft JhengHei"/>
+        <a:font script="Java" typeface="Javanese Text"/>
+        <a:font script="Lisu" typeface="Segoe UI"/>
+        <a:font script="Mymr" typeface="Myanmar Text"/>
+        <a:font script="Nkoo" typeface="Ebrima"/>
+        <a:font script="Olck" typeface="Nirmala UI"/>
+        <a:font script="Osma" typeface="Ebrima"/>
+        <a:font script="Phag" typeface="Phagspa"/>
+        <a:font script="Syrn" typeface="Estrangelo Edessa"/>
+        <a:font script="Syrj" typeface="Estrangelo Edessa"/>
+        <a:font script="Syre" typeface="Estrangelo Edessa"/>
+        <a:font script="Sora" typeface="Nirmala UI"/>
+        <a:font script="Tale" typeface="Microsoft Tai Le"/>
+        <a:font script="Talu" typeface="Microsoft New Tai Lue"/>
+        <a:font script="Tfng" typeface="Ebrima"/>
       </a:minorFont>
     </a:fontScheme>
     <a:fmtScheme name="Office">
@@ -9019,180 +9063,136 @@
           <a:gsLst>
             <a:gs pos="0">
               <a:schemeClr val="phClr">
-                <a:tint val="50000"/>
-                <a:satMod val="300000"/>
+                <a:lumMod val="110000"/>
+                <a:satMod val="105000"/>
+                <a:tint val="67000"/>
               </a:schemeClr>
             </a:gs>
-            <a:gs pos="35000">
+            <a:gs pos="50000">
               <a:schemeClr val="phClr">
-                <a:tint val="37000"/>
-                <a:satMod val="300000"/>
+                <a:lumMod val="105000"/>
+                <a:satMod val="103000"/>
+                <a:tint val="73000"/>
               </a:schemeClr>
             </a:gs>
             <a:gs pos="100000">
               <a:schemeClr val="phClr">
-                <a:tint val="15000"/>
-                <a:satMod val="350000"/>
+                <a:lumMod val="105000"/>
+                <a:satMod val="109000"/>
+                <a:tint val="81000"/>
               </a:schemeClr>
             </a:gs>
           </a:gsLst>
-          <a:lin ang="16200000" scaled="1"/>
+          <a:lin ang="5400000" scaled="0"/>
         </a:gradFill>
         <a:gradFill rotWithShape="1">
           <a:gsLst>
             <a:gs pos="0">
               <a:schemeClr val="phClr">
-                <a:tint val="100000"/>
+                <a:satMod val="103000"/>
+                <a:lumMod val="102000"/>
+                <a:tint val="94000"/>
+              </a:schemeClr>
+            </a:gs>
+            <a:gs pos="50000">
+              <a:schemeClr val="phClr">
+                <a:satMod val="110000"/>
+                <a:lumMod val="100000"/>
                 <a:shade val="100000"/>
-                <a:satMod val="130000"/>
               </a:schemeClr>
             </a:gs>
             <a:gs pos="100000">
               <a:schemeClr val="phClr">
-                <a:tint val="50000"/>
-                <a:shade val="100000"/>
-                <a:satMod val="350000"/>
+                <a:lumMod val="99000"/>
+                <a:satMod val="120000"/>
+                <a:shade val="78000"/>
               </a:schemeClr>
             </a:gs>
           </a:gsLst>
-          <a:lin ang="16200000" scaled="0"/>
+          <a:lin ang="5400000" scaled="0"/>
         </a:gradFill>
       </a:fillStyleLst>
       <a:lnStyleLst>
-        <a:ln w="9525" cap="flat" cmpd="sng" algn="ctr">
+        <a:ln w="12700" cap="flat" cmpd="sng" algn="ctr">
           <a:solidFill>
-            <a:schemeClr val="phClr">
-              <a:shade val="95000"/>
-              <a:satMod val="105000"/>
-            </a:schemeClr>
+            <a:schemeClr val="phClr"/>
           </a:solidFill>
           <a:prstDash val="solid"/>
+          <a:miter lim="800000"/>
+        </a:ln>
+        <a:ln w="19050" cap="flat" cmpd="sng" algn="ctr">
+          <a:solidFill>
+            <a:schemeClr val="phClr"/>
+          </a:solidFill>
+          <a:prstDash val="solid"/>
+          <a:miter lim="800000"/>
         </a:ln>
         <a:ln w="25400" cap="flat" cmpd="sng" algn="ctr">
           <a:solidFill>
             <a:schemeClr val="phClr"/>
           </a:solidFill>
           <a:prstDash val="solid"/>
-        </a:ln>
-        <a:ln w="38100" cap="flat" cmpd="sng" algn="ctr">
-          <a:solidFill>
-            <a:schemeClr val="phClr"/>
-          </a:solidFill>
-          <a:prstDash val="solid"/>
+          <a:miter lim="800000"/>
         </a:ln>
       </a:lnStyleLst>
       <a:effectStyleLst>
         <a:effectStyle>
+          <a:effectLst/>
+        </a:effectStyle>
+        <a:effectStyle>
+          <a:effectLst/>
+        </a:effectStyle>
+        <a:effectStyle>
           <a:effectLst>
-            <a:outerShdw blurRad="40000" dist="20000" dir="5400000" rotWithShape="0">
+            <a:outerShdw blurRad="57150" dist="19050" dir="5400000" algn="ctr" rotWithShape="0">
               <a:srgbClr val="000000">
-                <a:alpha val="38000"/>
+                <a:alpha val="63000"/>
               </a:srgbClr>
             </a:outerShdw>
           </a:effectLst>
-        </a:effectStyle>
-        <a:effectStyle>
-          <a:effectLst>
-            <a:outerShdw blurRad="40000" dist="23000" dir="5400000" rotWithShape="0">
-              <a:srgbClr val="000000">
-                <a:alpha val="35000"/>
-              </a:srgbClr>
-            </a:outerShdw>
-          </a:effectLst>
-        </a:effectStyle>
-        <a:effectStyle>
-          <a:effectLst>
-            <a:outerShdw blurRad="40000" dist="23000" dir="5400000" rotWithShape="0">
-              <a:srgbClr val="000000">
-                <a:alpha val="35000"/>
-              </a:srgbClr>
-            </a:outerShdw>
-          </a:effectLst>
-          <a:scene3d>
-            <a:camera prst="orthographicFront">
-              <a:rot lat="0" lon="0" rev="0"/>
-            </a:camera>
-            <a:lightRig rig="threePt" dir="t">
-              <a:rot lat="0" lon="0" rev="1200000"/>
-            </a:lightRig>
-          </a:scene3d>
-          <a:sp3d>
-            <a:bevelT w="63500" h="25400"/>
-          </a:sp3d>
         </a:effectStyle>
       </a:effectStyleLst>
       <a:bgFillStyleLst>
         <a:solidFill>
           <a:schemeClr val="phClr"/>
         </a:solidFill>
+        <a:solidFill>
+          <a:schemeClr val="phClr">
+            <a:tint val="95000"/>
+            <a:satMod val="170000"/>
+          </a:schemeClr>
+        </a:solidFill>
         <a:gradFill rotWithShape="1">
           <a:gsLst>
             <a:gs pos="0">
               <a:schemeClr val="phClr">
-                <a:tint val="40000"/>
-                <a:satMod val="350000"/>
+                <a:tint val="93000"/>
+                <a:satMod val="150000"/>
+                <a:shade val="98000"/>
+                <a:lumMod val="102000"/>
               </a:schemeClr>
             </a:gs>
-            <a:gs pos="40000">
+            <a:gs pos="50000">
               <a:schemeClr val="phClr">
-                <a:tint val="45000"/>
-                <a:shade val="99000"/>
-                <a:satMod val="350000"/>
+                <a:tint val="98000"/>
+                <a:satMod val="130000"/>
+                <a:shade val="90000"/>
+                <a:lumMod val="103000"/>
               </a:schemeClr>
             </a:gs>
             <a:gs pos="100000">
               <a:schemeClr val="phClr">
-                <a:shade val="20000"/>
-                <a:satMod val="255000"/>
+                <a:shade val="63000"/>
+                <a:satMod val="120000"/>
               </a:schemeClr>
             </a:gs>
           </a:gsLst>
-          <a:path path="circle">
-            <a:fillToRect l="50000" t="-80000" r="50000" b="180000"/>
-          </a:path>
-        </a:gradFill>
-        <a:gradFill rotWithShape="1">
-          <a:gsLst>
-            <a:gs pos="0">
-              <a:schemeClr val="phClr">
-                <a:tint val="80000"/>
-                <a:satMod val="300000"/>
-              </a:schemeClr>
-            </a:gs>
-            <a:gs pos="100000">
-              <a:schemeClr val="phClr">
-                <a:shade val="30000"/>
-                <a:satMod val="200000"/>
-              </a:schemeClr>
-            </a:gs>
-          </a:gsLst>
-          <a:path path="circle">
-            <a:fillToRect l="50000" t="50000" r="50000" b="50000"/>
-          </a:path>
+          <a:lin ang="5400000" scaled="0"/>
         </a:gradFill>
       </a:bgFillStyleLst>
     </a:fmtScheme>
   </a:themeElements>
   <a:objectDefaults>
-    <a:spDef>
-      <a:spPr/>
-      <a:bodyPr/>
-      <a:lstStyle/>
-      <a:style>
-        <a:lnRef idx="1">
-          <a:schemeClr val="accent1"/>
-        </a:lnRef>
-        <a:fillRef idx="3">
-          <a:schemeClr val="accent1"/>
-        </a:fillRef>
-        <a:effectRef idx="2">
-          <a:schemeClr val="accent1"/>
-        </a:effectRef>
-        <a:fontRef idx="minor">
-          <a:schemeClr val="lt1"/>
-        </a:fontRef>
-      </a:style>
-    </a:spDef>
     <a:lnDef>
       <a:spPr/>
       <a:bodyPr/>
@@ -9214,5 +9214,10 @@
     </a:lnDef>
   </a:objectDefaults>
   <a:extraClrSchemeLst/>
+  <a:extLst>
+    <a:ext uri="{05A4C25C-085E-4340-85A3-A5531E510DB2}">
+      <thm15:themeFamily xmlns:thm15="http://schemas.microsoft.com/office/thememl/2012/main" name="Office Theme" id="{2E142A2C-CD16-42D6-873A-C26D2A0506FA}" vid="{1BDDFF52-6CD6-40A5-AB3C-68EB2F1E4D0A}"/>
+    </a:ext>
+  </a:extLst>
 </a:theme>
 </file>